--- a/從榮耀降臨.pptx
+++ b/從榮耀降臨.pptx
@@ -5,12 +5,19 @@
     <p:sldMasterId id="2147483660" r:id="rId1"/>
   </p:sldMasterIdLst>
   <p:sldIdLst>
-    <p:sldId id="256" r:id="rId2"/>
-    <p:sldId id="257" r:id="rId3"/>
-    <p:sldId id="258" r:id="rId4"/>
-    <p:sldId id="259" r:id="rId5"/>
-    <p:sldId id="260" r:id="rId6"/>
-    <p:sldId id="261" r:id="rId7"/>
+    <p:sldId id="262" r:id="rId2"/>
+    <p:sldId id="263" r:id="rId3"/>
+    <p:sldId id="264" r:id="rId4"/>
+    <p:sldId id="265" r:id="rId5"/>
+    <p:sldId id="266" r:id="rId6"/>
+    <p:sldId id="267" r:id="rId7"/>
+    <p:sldId id="268" r:id="rId8"/>
+    <p:sldId id="271" r:id="rId9"/>
+    <p:sldId id="272" r:id="rId10"/>
+    <p:sldId id="269" r:id="rId11"/>
+    <p:sldId id="270" r:id="rId12"/>
+    <p:sldId id="273" r:id="rId13"/>
+    <p:sldId id="274" r:id="rId14"/>
   </p:sldIdLst>
   <p:sldSz cx="12192000" cy="6858000"/>
   <p:notesSz cx="6858000" cy="9144000"/>
@@ -309,7 +316,7 @@
           <a:p>
             <a:fld id="{B14AFC3B-F8C8-402F-BAE4-F4FD0FE010A2}" type="datetimeFigureOut">
               <a:rPr lang="zh-TW" altLang="en-US" smtClean="0"/>
-              <a:t>2019/11/30</a:t>
+              <a:t>2026/8/1</a:t>
             </a:fld>
             <a:endParaRPr lang="zh-TW" altLang="en-US"/>
           </a:p>
@@ -474,7 +481,7 @@
           <a:p>
             <a:fld id="{B14AFC3B-F8C8-402F-BAE4-F4FD0FE010A2}" type="datetimeFigureOut">
               <a:rPr lang="zh-TW" altLang="en-US" smtClean="0"/>
-              <a:t>2019/11/30</a:t>
+              <a:t>2026/8/1</a:t>
             </a:fld>
             <a:endParaRPr lang="zh-TW" altLang="en-US"/>
           </a:p>
@@ -649,7 +656,7 @@
           <a:p>
             <a:fld id="{B14AFC3B-F8C8-402F-BAE4-F4FD0FE010A2}" type="datetimeFigureOut">
               <a:rPr lang="zh-TW" altLang="en-US" smtClean="0"/>
-              <a:t>2019/11/30</a:t>
+              <a:t>2026/8/1</a:t>
             </a:fld>
             <a:endParaRPr lang="zh-TW" altLang="en-US"/>
           </a:p>
@@ -814,7 +821,7 @@
           <a:p>
             <a:fld id="{B14AFC3B-F8C8-402F-BAE4-F4FD0FE010A2}" type="datetimeFigureOut">
               <a:rPr lang="zh-TW" altLang="en-US" smtClean="0"/>
-              <a:t>2019/11/30</a:t>
+              <a:t>2026/8/1</a:t>
             </a:fld>
             <a:endParaRPr lang="zh-TW" altLang="en-US"/>
           </a:p>
@@ -1055,7 +1062,7 @@
           <a:p>
             <a:fld id="{B14AFC3B-F8C8-402F-BAE4-F4FD0FE010A2}" type="datetimeFigureOut">
               <a:rPr lang="zh-TW" altLang="en-US" smtClean="0"/>
-              <a:t>2019/11/30</a:t>
+              <a:t>2026/8/1</a:t>
             </a:fld>
             <a:endParaRPr lang="zh-TW" altLang="en-US"/>
           </a:p>
@@ -1338,7 +1345,7 @@
           <a:p>
             <a:fld id="{B14AFC3B-F8C8-402F-BAE4-F4FD0FE010A2}" type="datetimeFigureOut">
               <a:rPr lang="zh-TW" altLang="en-US" smtClean="0"/>
-              <a:t>2019/11/30</a:t>
+              <a:t>2026/8/1</a:t>
             </a:fld>
             <a:endParaRPr lang="zh-TW" altLang="en-US"/>
           </a:p>
@@ -1755,7 +1762,7 @@
           <a:p>
             <a:fld id="{B14AFC3B-F8C8-402F-BAE4-F4FD0FE010A2}" type="datetimeFigureOut">
               <a:rPr lang="zh-TW" altLang="en-US" smtClean="0"/>
-              <a:t>2019/11/30</a:t>
+              <a:t>2026/8/1</a:t>
             </a:fld>
             <a:endParaRPr lang="zh-TW" altLang="en-US"/>
           </a:p>
@@ -1868,7 +1875,7 @@
           <a:p>
             <a:fld id="{B14AFC3B-F8C8-402F-BAE4-F4FD0FE010A2}" type="datetimeFigureOut">
               <a:rPr lang="zh-TW" altLang="en-US" smtClean="0"/>
-              <a:t>2019/11/30</a:t>
+              <a:t>2026/8/1</a:t>
             </a:fld>
             <a:endParaRPr lang="zh-TW" altLang="en-US"/>
           </a:p>
@@ -1958,7 +1965,7 @@
           <a:p>
             <a:fld id="{B14AFC3B-F8C8-402F-BAE4-F4FD0FE010A2}" type="datetimeFigureOut">
               <a:rPr lang="zh-TW" altLang="en-US" smtClean="0"/>
-              <a:t>2019/11/30</a:t>
+              <a:t>2026/8/1</a:t>
             </a:fld>
             <a:endParaRPr lang="zh-TW" altLang="en-US"/>
           </a:p>
@@ -2230,7 +2237,7 @@
           <a:p>
             <a:fld id="{B14AFC3B-F8C8-402F-BAE4-F4FD0FE010A2}" type="datetimeFigureOut">
               <a:rPr lang="zh-TW" altLang="en-US" smtClean="0"/>
-              <a:t>2019/11/30</a:t>
+              <a:t>2026/8/1</a:t>
             </a:fld>
             <a:endParaRPr lang="zh-TW" altLang="en-US"/>
           </a:p>
@@ -2482,7 +2489,7 @@
           <a:p>
             <a:fld id="{B14AFC3B-F8C8-402F-BAE4-F4FD0FE010A2}" type="datetimeFigureOut">
               <a:rPr lang="zh-TW" altLang="en-US" smtClean="0"/>
-              <a:t>2019/11/30</a:t>
+              <a:t>2026/8/1</a:t>
             </a:fld>
             <a:endParaRPr lang="zh-TW" altLang="en-US"/>
           </a:p>
@@ -2695,7 +2702,7 @@
           <a:p>
             <a:fld id="{B14AFC3B-F8C8-402F-BAE4-F4FD0FE010A2}" type="datetimeFigureOut">
               <a:rPr lang="zh-TW" altLang="en-US" smtClean="0"/>
-              <a:t>2019/11/30</a:t>
+              <a:t>2026/8/1</a:t>
             </a:fld>
             <a:endParaRPr lang="zh-TW" altLang="en-US"/>
           </a:p>
@@ -3053,7 +3060,13 @@
   <p:cSld>
     <p:spTree>
       <p:nvGrpSpPr>
-        <p:cNvPr id="1" name=""/>
+        <p:cNvPr id="1" name="">
+          <a:extLst>
+            <a:ext uri="{FF2B5EF4-FFF2-40B4-BE49-F238E27FC236}">
+              <a16:creationId xmlns:a16="http://schemas.microsoft.com/office/drawing/2014/main" id="{5F20F3D7-EDDF-CE30-9060-314A88E3730B}"/>
+            </a:ext>
+          </a:extLst>
+        </p:cNvPr>
         <p:cNvGrpSpPr/>
         <p:nvPr/>
       </p:nvGrpSpPr>
@@ -3067,7 +3080,13 @@
       </p:grpSpPr>
       <p:sp>
         <p:nvSpPr>
-          <p:cNvPr id="4" name="標題 3"/>
+          <p:cNvPr id="4" name="標題 3">
+            <a:extLst>
+              <a:ext uri="{FF2B5EF4-FFF2-40B4-BE49-F238E27FC236}">
+                <a16:creationId xmlns:a16="http://schemas.microsoft.com/office/drawing/2014/main" id="{CD6A41DD-B5E6-D530-EC0F-85726817D119}"/>
+              </a:ext>
+            </a:extLst>
+          </p:cNvPr>
           <p:cNvSpPr>
             <a:spLocks noGrp="1"/>
           </p:cNvSpPr>
@@ -3075,24 +3094,130 @@
             <p:ph type="title"/>
           </p:nvPr>
         </p:nvSpPr>
-        <p:spPr/>
+        <p:spPr>
+          <a:xfrm>
+            <a:off x="0" y="2660915"/>
+            <a:ext cx="12192000" cy="1143000"/>
+          </a:xfrm>
+        </p:spPr>
         <p:txBody>
           <a:bodyPr>
-            <a:normAutofit/>
+            <a:noAutofit/>
           </a:bodyPr>
           <a:lstStyle/>
           <a:p>
             <a:r>
-              <a:rPr lang="zh-TW" altLang="en-US" b="1" dirty="0" smtClean="0">
+              <a:rPr lang="zh-TW" altLang="en-US" sz="7200" b="1" i="1" dirty="0">
                 <a:solidFill>
                   <a:srgbClr val="000066"/>
                 </a:solidFill>
+                <a:effectLst>
+                  <a:outerShdw blurRad="38100" dist="38100" dir="2700000" algn="tl">
+                    <a:srgbClr val="000000">
+                      <a:alpha val="43137"/>
+                    </a:srgbClr>
+                  </a:outerShdw>
+                </a:effectLst>
                 <a:latin typeface="微軟正黑體" pitchFamily="34" charset="-120"/>
                 <a:ea typeface="微軟正黑體" pitchFamily="34" charset="-120"/>
               </a:rPr>
               <a:t>從榮耀降臨</a:t>
             </a:r>
-            <a:endParaRPr lang="zh-TW" altLang="en-US" b="1" dirty="0">
+            <a:endParaRPr lang="zh-TW" altLang="en-US" sz="7200" b="1" i="1" dirty="0">
+              <a:solidFill>
+                <a:srgbClr val="000066"/>
+              </a:solidFill>
+              <a:effectLst>
+                <a:outerShdw blurRad="38100" dist="38100" dir="2700000" algn="tl">
+                  <a:srgbClr val="000000">
+                    <a:alpha val="43137"/>
+                  </a:srgbClr>
+                </a:outerShdw>
+              </a:effectLst>
+              <a:latin typeface="微軟正黑體" pitchFamily="34" charset="-120"/>
+              <a:ea typeface="微軟正黑體" pitchFamily="34" charset="-120"/>
+            </a:endParaRPr>
+          </a:p>
+        </p:txBody>
+      </p:sp>
+    </p:spTree>
+    <p:extLst>
+      <p:ext uri="{BB962C8B-B14F-4D97-AF65-F5344CB8AC3E}">
+        <p14:creationId xmlns:p14="http://schemas.microsoft.com/office/powerpoint/2010/main" val="3023339451"/>
+      </p:ext>
+    </p:extLst>
+  </p:cSld>
+  <p:clrMapOvr>
+    <a:masterClrMapping/>
+  </p:clrMapOvr>
+</p:sld>
+</file>
+
+<file path=ppt/slides/slide10.xml><?xml version="1.0" encoding="utf-8"?>
+<p:sld xmlns:a="http://schemas.openxmlformats.org/drawingml/2006/main" xmlns:r="http://schemas.openxmlformats.org/officeDocument/2006/relationships" xmlns:p="http://schemas.openxmlformats.org/presentationml/2006/main">
+  <p:cSld>
+    <p:spTree>
+      <p:nvGrpSpPr>
+        <p:cNvPr id="1" name="">
+          <a:extLst>
+            <a:ext uri="{FF2B5EF4-FFF2-40B4-BE49-F238E27FC236}">
+              <a16:creationId xmlns:a16="http://schemas.microsoft.com/office/drawing/2014/main" id="{499F6A04-361B-D03C-72FC-83746A3861FC}"/>
+            </a:ext>
+          </a:extLst>
+        </p:cNvPr>
+        <p:cNvGrpSpPr/>
+        <p:nvPr/>
+      </p:nvGrpSpPr>
+      <p:grpSpPr>
+        <a:xfrm>
+          <a:off x="0" y="0"/>
+          <a:ext cx="0" cy="0"/>
+          <a:chOff x="0" y="0"/>
+          <a:chExt cx="0" cy="0"/>
+        </a:xfrm>
+      </p:grpSpPr>
+      <p:sp>
+        <p:nvSpPr>
+          <p:cNvPr id="5" name="內容版面配置區 4">
+            <a:extLst>
+              <a:ext uri="{FF2B5EF4-FFF2-40B4-BE49-F238E27FC236}">
+                <a16:creationId xmlns:a16="http://schemas.microsoft.com/office/drawing/2014/main" id="{EE77592B-EE8B-614D-4160-CDFC7BCE80DB}"/>
+              </a:ext>
+            </a:extLst>
+          </p:cNvPr>
+          <p:cNvSpPr>
+            <a:spLocks noGrp="1"/>
+          </p:cNvSpPr>
+          <p:nvPr>
+            <p:ph idx="1"/>
+          </p:nvPr>
+        </p:nvSpPr>
+        <p:spPr>
+          <a:xfrm>
+            <a:off x="0" y="2084851"/>
+            <a:ext cx="12192000" cy="2404863"/>
+          </a:xfrm>
+        </p:spPr>
+        <p:txBody>
+          <a:bodyPr anchor="ctr">
+            <a:normAutofit/>
+          </a:bodyPr>
+          <a:lstStyle/>
+          <a:p>
+            <a:pPr lvl="0" algn="ctr">
+              <a:buNone/>
+            </a:pPr>
+            <a:r>
+              <a:rPr lang="zh-TW" altLang="en-US" sz="6600" b="1" dirty="0">
+                <a:solidFill>
+                  <a:srgbClr val="000066"/>
+                </a:solidFill>
+                <a:latin typeface="微軟正黑體" pitchFamily="34" charset="-120"/>
+                <a:ea typeface="微軟正黑體" pitchFamily="34" charset="-120"/>
+              </a:rPr>
+              <a:t>主甘心樂意  道成血肉身體</a:t>
+            </a:r>
+            <a:endParaRPr lang="en-US" altLang="zh-TW" sz="6600" b="1" dirty="0">
               <a:solidFill>
                 <a:srgbClr val="000066"/>
               </a:solidFill>
@@ -3100,59 +3225,21 @@
               <a:ea typeface="微軟正黑體" pitchFamily="34" charset="-120"/>
             </a:endParaRPr>
           </a:p>
-        </p:txBody>
-      </p:sp>
-      <p:sp>
-        <p:nvSpPr>
-          <p:cNvPr id="5" name="內容版面配置區 4"/>
-          <p:cNvSpPr>
-            <a:spLocks noGrp="1"/>
-          </p:cNvSpPr>
-          <p:nvPr>
-            <p:ph idx="1"/>
-          </p:nvPr>
-        </p:nvSpPr>
-        <p:spPr>
-          <a:xfrm>
-            <a:off x="1524000" y="1600201"/>
-            <a:ext cx="9144000" cy="4525963"/>
-          </a:xfrm>
-        </p:spPr>
-        <p:txBody>
-          <a:bodyPr>
-            <a:noAutofit/>
-          </a:bodyPr>
-          <a:lstStyle/>
           <a:p>
             <a:pPr lvl="0" algn="ctr">
               <a:buNone/>
             </a:pPr>
             <a:r>
-              <a:rPr lang="zh-TW" altLang="en-US" sz="5400" b="1" dirty="0">
+              <a:rPr lang="zh-TW" altLang="en-US" sz="6600" b="1" dirty="0">
                 <a:solidFill>
                   <a:srgbClr val="000066"/>
                 </a:solidFill>
                 <a:latin typeface="微軟正黑體" pitchFamily="34" charset="-120"/>
                 <a:ea typeface="微軟正黑體" pitchFamily="34" charset="-120"/>
               </a:rPr>
-              <a:t>從榮耀降臨  永遠奇妙福音</a:t>
-            </a:r>
-          </a:p>
-          <a:p>
-            <a:pPr algn="ctr">
-              <a:buNone/>
-            </a:pPr>
-            <a:r>
-              <a:rPr lang="zh-TW" altLang="en-US" sz="5400" b="1" dirty="0">
-                <a:solidFill>
-                  <a:srgbClr val="000066"/>
-                </a:solidFill>
-                <a:latin typeface="微軟正黑體" pitchFamily="34" charset="-120"/>
-                <a:ea typeface="微軟正黑體" pitchFamily="34" charset="-120"/>
-              </a:rPr>
-              <a:t>我神我主降臨  耶穌是祂聖名</a:t>
-            </a:r>
-            <a:endParaRPr lang="en-US" altLang="zh-TW" sz="5400" b="1" dirty="0">
+              <a:t>取了世人樣式  顯明隱藏美旨</a:t>
+            </a:r>
+            <a:endParaRPr lang="en-US" altLang="zh-TW" sz="6600" b="1" dirty="0">
               <a:solidFill>
                 <a:srgbClr val="000066"/>
               </a:solidFill>
@@ -3160,36 +3247,165 @@
               <a:ea typeface="微軟正黑體" pitchFamily="34" charset="-120"/>
             </a:endParaRPr>
           </a:p>
-          <a:p>
-            <a:pPr algn="ctr">
+        </p:txBody>
+      </p:sp>
+      <p:sp>
+        <p:nvSpPr>
+          <p:cNvPr id="3" name="TextBox 2">
+            <a:extLst>
+              <a:ext uri="{FF2B5EF4-FFF2-40B4-BE49-F238E27FC236}">
+                <a16:creationId xmlns:a16="http://schemas.microsoft.com/office/drawing/2014/main" id="{FA175DD0-F211-14DE-420F-4A50F79B6BD2}"/>
+              </a:ext>
+            </a:extLst>
+          </p:cNvPr>
+          <p:cNvSpPr txBox="1"/>
+          <p:nvPr/>
+        </p:nvSpPr>
+        <p:spPr>
+          <a:xfrm>
+            <a:off x="0" y="5157193"/>
+            <a:ext cx="12192000" cy="584775"/>
+          </a:xfrm>
+          <a:prstGeom prst="rect">
+            <a:avLst/>
+          </a:prstGeom>
+          <a:noFill/>
+        </p:spPr>
+        <p:txBody>
+          <a:bodyPr wrap="square" rtlCol="0">
+            <a:spAutoFit/>
+          </a:bodyPr>
+          <a:lstStyle/>
+          <a:p>
+            <a:pPr algn="ctr"/>
+            <a:r>
+              <a:rPr lang="en-US" sz="3200" b="1" dirty="0">
+                <a:solidFill>
+                  <a:srgbClr val="000066"/>
+                </a:solidFill>
+                <a:latin typeface="+mj-lt"/>
+                <a:ea typeface="Microsoft JhengHei" panose="020B0604030504040204" pitchFamily="34" charset="-120"/>
+              </a:rPr>
+              <a:t>( </a:t>
+            </a:r>
+            <a:r>
+              <a:rPr lang="en-US" altLang="zh-CN" sz="3200" b="1" dirty="0" smtClean="0">
+                <a:solidFill>
+                  <a:srgbClr val="000066"/>
+                </a:solidFill>
+                <a:latin typeface="+mj-lt"/>
+                <a:ea typeface="Microsoft JhengHei" panose="020B0604030504040204" pitchFamily="34" charset="-120"/>
+              </a:rPr>
+              <a:t>3 / 3</a:t>
+            </a:r>
+            <a:r>
+              <a:rPr lang="en-US" sz="3200" b="1" dirty="0" smtClean="0">
+                <a:solidFill>
+                  <a:srgbClr val="000066"/>
+                </a:solidFill>
+                <a:latin typeface="+mj-lt"/>
+                <a:ea typeface="Microsoft JhengHei" panose="020B0604030504040204" pitchFamily="34" charset="-120"/>
+              </a:rPr>
+              <a:t> </a:t>
+            </a:r>
+            <a:r>
+              <a:rPr lang="en-US" sz="3200" b="1" dirty="0">
+                <a:solidFill>
+                  <a:srgbClr val="000066"/>
+                </a:solidFill>
+                <a:latin typeface="+mj-lt"/>
+                <a:ea typeface="Microsoft JhengHei" panose="020B0604030504040204" pitchFamily="34" charset="-120"/>
+              </a:rPr>
+              <a:t>)</a:t>
+            </a:r>
+            <a:endParaRPr lang="vi-VN" sz="3200" b="1" dirty="0">
+              <a:solidFill>
+                <a:srgbClr val="000066"/>
+              </a:solidFill>
+              <a:latin typeface="+mj-lt"/>
+              <a:ea typeface="Microsoft JhengHei" panose="020B0604030504040204" pitchFamily="34" charset="-120"/>
+            </a:endParaRPr>
+          </a:p>
+        </p:txBody>
+      </p:sp>
+    </p:spTree>
+    <p:extLst>
+      <p:ext uri="{BB962C8B-B14F-4D97-AF65-F5344CB8AC3E}">
+        <p14:creationId xmlns:p14="http://schemas.microsoft.com/office/powerpoint/2010/main" val="3207403643"/>
+      </p:ext>
+    </p:extLst>
+  </p:cSld>
+  <p:clrMapOvr>
+    <a:masterClrMapping/>
+  </p:clrMapOvr>
+</p:sld>
+</file>
+
+<file path=ppt/slides/slide11.xml><?xml version="1.0" encoding="utf-8"?>
+<p:sld xmlns:a="http://schemas.openxmlformats.org/drawingml/2006/main" xmlns:r="http://schemas.openxmlformats.org/officeDocument/2006/relationships" xmlns:p="http://schemas.openxmlformats.org/presentationml/2006/main">
+  <p:cSld>
+    <p:spTree>
+      <p:nvGrpSpPr>
+        <p:cNvPr id="1" name="">
+          <a:extLst>
+            <a:ext uri="{FF2B5EF4-FFF2-40B4-BE49-F238E27FC236}">
+              <a16:creationId xmlns:a16="http://schemas.microsoft.com/office/drawing/2014/main" id="{499F6A04-361B-D03C-72FC-83746A3861FC}"/>
+            </a:ext>
+          </a:extLst>
+        </p:cNvPr>
+        <p:cNvGrpSpPr/>
+        <p:nvPr/>
+      </p:nvGrpSpPr>
+      <p:grpSpPr>
+        <a:xfrm>
+          <a:off x="0" y="0"/>
+          <a:ext cx="0" cy="0"/>
+          <a:chOff x="0" y="0"/>
+          <a:chExt cx="0" cy="0"/>
+        </a:xfrm>
+      </p:grpSpPr>
+      <p:sp>
+        <p:nvSpPr>
+          <p:cNvPr id="5" name="內容版面配置區 4">
+            <a:extLst>
+              <a:ext uri="{FF2B5EF4-FFF2-40B4-BE49-F238E27FC236}">
+                <a16:creationId xmlns:a16="http://schemas.microsoft.com/office/drawing/2014/main" id="{EE77592B-EE8B-614D-4160-CDFC7BCE80DB}"/>
+              </a:ext>
+            </a:extLst>
+          </p:cNvPr>
+          <p:cNvSpPr>
+            <a:spLocks noGrp="1"/>
+          </p:cNvSpPr>
+          <p:nvPr>
+            <p:ph idx="1"/>
+          </p:nvPr>
+        </p:nvSpPr>
+        <p:spPr>
+          <a:xfrm>
+            <a:off x="0" y="2084851"/>
+            <a:ext cx="12192000" cy="2404863"/>
+          </a:xfrm>
+        </p:spPr>
+        <p:txBody>
+          <a:bodyPr anchor="ctr">
+            <a:normAutofit/>
+          </a:bodyPr>
+          <a:lstStyle/>
+          <a:p>
+            <a:pPr lvl="0" algn="ctr">
               <a:buNone/>
             </a:pPr>
             <a:r>
-              <a:rPr lang="zh-TW" altLang="en-US" sz="5400" b="1" dirty="0">
+              <a:rPr lang="zh-TW" altLang="en-US" sz="6600" b="1" dirty="0">
                 <a:solidFill>
                   <a:srgbClr val="000066"/>
                 </a:solidFill>
                 <a:latin typeface="微軟正黑體" pitchFamily="34" charset="-120"/>
                 <a:ea typeface="微軟正黑體" pitchFamily="34" charset="-120"/>
               </a:rPr>
-              <a:t>生在馬槽裡  世人看為客旅</a:t>
-            </a:r>
-          </a:p>
-          <a:p>
-            <a:pPr algn="ctr">
-              <a:buNone/>
-            </a:pPr>
-            <a:r>
-              <a:rPr lang="zh-TW" altLang="en-US" sz="5400" b="1" dirty="0">
-                <a:solidFill>
-                  <a:srgbClr val="000066"/>
-                </a:solidFill>
-                <a:latin typeface="微軟正黑體" pitchFamily="34" charset="-120"/>
-                <a:ea typeface="微軟正黑體" pitchFamily="34" charset="-120"/>
-              </a:rPr>
-              <a:t>在世受盡悲傷  流淚  飄零</a:t>
-            </a:r>
-            <a:endParaRPr lang="zh-TW" altLang="en-US" sz="5400" b="1" dirty="0">
+              <a:t>榮耀的奧祕  加略山的燔祭</a:t>
+            </a:r>
+            <a:endParaRPr lang="en-US" altLang="zh-TW" sz="6600" b="1" dirty="0">
               <a:solidFill>
                 <a:srgbClr val="000066"/>
               </a:solidFill>
@@ -3197,9 +3413,336 @@
               <a:ea typeface="微軟正黑體" pitchFamily="34" charset="-120"/>
             </a:endParaRPr>
           </a:p>
+          <a:p>
+            <a:pPr lvl="0" algn="ctr">
+              <a:buNone/>
+            </a:pPr>
+            <a:r>
+              <a:rPr lang="zh-TW" altLang="en-US" sz="6600" b="1" dirty="0">
+                <a:solidFill>
+                  <a:srgbClr val="000066"/>
+                </a:solidFill>
+                <a:latin typeface="微軟正黑體" pitchFamily="34" charset="-120"/>
+                <a:ea typeface="微軟正黑體" pitchFamily="34" charset="-120"/>
+              </a:rPr>
+              <a:t>自有永有的神偉大無比</a:t>
+            </a:r>
+            <a:endParaRPr lang="zh-TW" altLang="en-US" sz="6600" b="1" dirty="0">
+              <a:solidFill>
+                <a:srgbClr val="000066"/>
+              </a:solidFill>
+              <a:latin typeface="微軟正黑體" pitchFamily="34" charset="-120"/>
+              <a:ea typeface="微軟正黑體" pitchFamily="34" charset="-120"/>
+            </a:endParaRPr>
+          </a:p>
+        </p:txBody>
+      </p:sp>
+      <p:sp>
+        <p:nvSpPr>
+          <p:cNvPr id="3" name="TextBox 2">
+            <a:extLst>
+              <a:ext uri="{FF2B5EF4-FFF2-40B4-BE49-F238E27FC236}">
+                <a16:creationId xmlns:a16="http://schemas.microsoft.com/office/drawing/2014/main" id="{FA175DD0-F211-14DE-420F-4A50F79B6BD2}"/>
+              </a:ext>
+            </a:extLst>
+          </p:cNvPr>
+          <p:cNvSpPr txBox="1"/>
+          <p:nvPr/>
+        </p:nvSpPr>
+        <p:spPr>
+          <a:xfrm>
+            <a:off x="0" y="5157193"/>
+            <a:ext cx="12192000" cy="584775"/>
+          </a:xfrm>
+          <a:prstGeom prst="rect">
+            <a:avLst/>
+          </a:prstGeom>
+          <a:noFill/>
+        </p:spPr>
+        <p:txBody>
+          <a:bodyPr wrap="square" rtlCol="0">
+            <a:spAutoFit/>
+          </a:bodyPr>
+          <a:lstStyle/>
+          <a:p>
+            <a:pPr algn="ctr"/>
+            <a:r>
+              <a:rPr lang="en-US" sz="3200" b="1" dirty="0">
+                <a:solidFill>
+                  <a:srgbClr val="000066"/>
+                </a:solidFill>
+                <a:latin typeface="+mj-lt"/>
+                <a:ea typeface="Microsoft JhengHei" panose="020B0604030504040204" pitchFamily="34" charset="-120"/>
+              </a:rPr>
+              <a:t>( </a:t>
+            </a:r>
+            <a:r>
+              <a:rPr lang="en-US" altLang="zh-CN" sz="3200" b="1" dirty="0" smtClean="0">
+                <a:solidFill>
+                  <a:srgbClr val="000066"/>
+                </a:solidFill>
+                <a:latin typeface="+mj-lt"/>
+                <a:ea typeface="Microsoft JhengHei" panose="020B0604030504040204" pitchFamily="34" charset="-120"/>
+              </a:rPr>
+              <a:t>3 / 3</a:t>
+            </a:r>
+            <a:r>
+              <a:rPr lang="en-US" sz="3200" b="1" dirty="0" smtClean="0">
+                <a:solidFill>
+                  <a:srgbClr val="000066"/>
+                </a:solidFill>
+                <a:latin typeface="+mj-lt"/>
+                <a:ea typeface="Microsoft JhengHei" panose="020B0604030504040204" pitchFamily="34" charset="-120"/>
+              </a:rPr>
+              <a:t> </a:t>
+            </a:r>
+            <a:r>
+              <a:rPr lang="en-US" sz="3200" b="1" dirty="0">
+                <a:solidFill>
+                  <a:srgbClr val="000066"/>
+                </a:solidFill>
+                <a:latin typeface="+mj-lt"/>
+                <a:ea typeface="Microsoft JhengHei" panose="020B0604030504040204" pitchFamily="34" charset="-120"/>
+              </a:rPr>
+              <a:t>)</a:t>
+            </a:r>
+            <a:endParaRPr lang="vi-VN" sz="3200" b="1" dirty="0">
+              <a:solidFill>
+                <a:srgbClr val="000066"/>
+              </a:solidFill>
+              <a:latin typeface="+mj-lt"/>
+              <a:ea typeface="Microsoft JhengHei" panose="020B0604030504040204" pitchFamily="34" charset="-120"/>
+            </a:endParaRPr>
+          </a:p>
         </p:txBody>
       </p:sp>
     </p:spTree>
+    <p:extLst>
+      <p:ext uri="{BB962C8B-B14F-4D97-AF65-F5344CB8AC3E}">
+        <p14:creationId xmlns:p14="http://schemas.microsoft.com/office/powerpoint/2010/main" val="2746231571"/>
+      </p:ext>
+    </p:extLst>
+  </p:cSld>
+  <p:clrMapOvr>
+    <a:masterClrMapping/>
+  </p:clrMapOvr>
+</p:sld>
+</file>
+
+<file path=ppt/slides/slide12.xml><?xml version="1.0" encoding="utf-8"?>
+<p:sld xmlns:a="http://schemas.openxmlformats.org/drawingml/2006/main" xmlns:r="http://schemas.openxmlformats.org/officeDocument/2006/relationships" xmlns:p="http://schemas.openxmlformats.org/presentationml/2006/main">
+  <p:cSld>
+    <p:spTree>
+      <p:nvGrpSpPr>
+        <p:cNvPr id="1" name="">
+          <a:extLst>
+            <a:ext uri="{FF2B5EF4-FFF2-40B4-BE49-F238E27FC236}">
+              <a16:creationId xmlns:a16="http://schemas.microsoft.com/office/drawing/2014/main" id="{499F6A04-361B-D03C-72FC-83746A3861FC}"/>
+            </a:ext>
+          </a:extLst>
+        </p:cNvPr>
+        <p:cNvGrpSpPr/>
+        <p:nvPr/>
+      </p:nvGrpSpPr>
+      <p:grpSpPr>
+        <a:xfrm>
+          <a:off x="0" y="0"/>
+          <a:ext cx="0" cy="0"/>
+          <a:chOff x="0" y="0"/>
+          <a:chExt cx="0" cy="0"/>
+        </a:xfrm>
+      </p:grpSpPr>
+      <p:sp>
+        <p:nvSpPr>
+          <p:cNvPr id="5" name="內容版面配置區 4">
+            <a:extLst>
+              <a:ext uri="{FF2B5EF4-FFF2-40B4-BE49-F238E27FC236}">
+                <a16:creationId xmlns:a16="http://schemas.microsoft.com/office/drawing/2014/main" id="{EE77592B-EE8B-614D-4160-CDFC7BCE80DB}"/>
+              </a:ext>
+            </a:extLst>
+          </p:cNvPr>
+          <p:cNvSpPr>
+            <a:spLocks noGrp="1"/>
+          </p:cNvSpPr>
+          <p:nvPr>
+            <p:ph idx="1"/>
+          </p:nvPr>
+        </p:nvSpPr>
+        <p:spPr>
+          <a:xfrm>
+            <a:off x="0" y="2084851"/>
+            <a:ext cx="12192000" cy="2404863"/>
+          </a:xfrm>
+        </p:spPr>
+        <p:txBody>
+          <a:bodyPr anchor="ctr">
+            <a:normAutofit/>
+          </a:bodyPr>
+          <a:lstStyle/>
+          <a:p>
+            <a:pPr algn="ctr">
+              <a:buNone/>
+            </a:pPr>
+            <a:r>
+              <a:rPr lang="zh-TW" altLang="en-US" sz="6600" b="1" dirty="0">
+                <a:solidFill>
+                  <a:srgbClr val="000066"/>
+                </a:solidFill>
+                <a:latin typeface="微軟正黑體" pitchFamily="34" charset="-120"/>
+                <a:ea typeface="微軟正黑體" pitchFamily="34" charset="-120"/>
+              </a:rPr>
+              <a:t>我何等愛主  何等崇拜主</a:t>
+            </a:r>
+            <a:endParaRPr lang="en-US" altLang="zh-TW" sz="6600" b="1" dirty="0">
+              <a:solidFill>
+                <a:srgbClr val="000066"/>
+              </a:solidFill>
+              <a:latin typeface="微軟正黑體" pitchFamily="34" charset="-120"/>
+              <a:ea typeface="微軟正黑體" pitchFamily="34" charset="-120"/>
+            </a:endParaRPr>
+          </a:p>
+          <a:p>
+            <a:pPr algn="ctr">
+              <a:buNone/>
+            </a:pPr>
+            <a:r>
+              <a:rPr lang="zh-TW" altLang="en-US" sz="6600" b="1" dirty="0">
+                <a:solidFill>
+                  <a:srgbClr val="000066"/>
+                </a:solidFill>
+                <a:latin typeface="微軟正黑體" pitchFamily="34" charset="-120"/>
+                <a:ea typeface="微軟正黑體" pitchFamily="34" charset="-120"/>
+              </a:rPr>
+              <a:t>我生命亮光  我的一切</a:t>
+            </a:r>
+            <a:endParaRPr lang="zh-TW" altLang="en-US" sz="6600" b="1" dirty="0">
+              <a:solidFill>
+                <a:srgbClr val="000066"/>
+              </a:solidFill>
+              <a:latin typeface="微軟正黑體" pitchFamily="34" charset="-120"/>
+              <a:ea typeface="微軟正黑體" pitchFamily="34" charset="-120"/>
+            </a:endParaRPr>
+          </a:p>
+        </p:txBody>
+      </p:sp>
+    </p:spTree>
+    <p:extLst>
+      <p:ext uri="{BB962C8B-B14F-4D97-AF65-F5344CB8AC3E}">
+        <p14:creationId xmlns:p14="http://schemas.microsoft.com/office/powerpoint/2010/main" val="1394520550"/>
+      </p:ext>
+    </p:extLst>
+  </p:cSld>
+  <p:clrMapOvr>
+    <a:masterClrMapping/>
+  </p:clrMapOvr>
+</p:sld>
+</file>
+
+<file path=ppt/slides/slide13.xml><?xml version="1.0" encoding="utf-8"?>
+<p:sld xmlns:a="http://schemas.openxmlformats.org/drawingml/2006/main" xmlns:r="http://schemas.openxmlformats.org/officeDocument/2006/relationships" xmlns:p="http://schemas.openxmlformats.org/presentationml/2006/main">
+  <p:cSld>
+    <p:spTree>
+      <p:nvGrpSpPr>
+        <p:cNvPr id="1" name="">
+          <a:extLst>
+            <a:ext uri="{FF2B5EF4-FFF2-40B4-BE49-F238E27FC236}">
+              <a16:creationId xmlns:a16="http://schemas.microsoft.com/office/drawing/2014/main" id="{499F6A04-361B-D03C-72FC-83746A3861FC}"/>
+            </a:ext>
+          </a:extLst>
+        </p:cNvPr>
+        <p:cNvGrpSpPr/>
+        <p:nvPr/>
+      </p:nvGrpSpPr>
+      <p:grpSpPr>
+        <a:xfrm>
+          <a:off x="0" y="0"/>
+          <a:ext cx="0" cy="0"/>
+          <a:chOff x="0" y="0"/>
+          <a:chExt cx="0" cy="0"/>
+        </a:xfrm>
+      </p:grpSpPr>
+      <p:sp>
+        <p:nvSpPr>
+          <p:cNvPr id="5" name="內容版面配置區 4">
+            <a:extLst>
+              <a:ext uri="{FF2B5EF4-FFF2-40B4-BE49-F238E27FC236}">
+                <a16:creationId xmlns:a16="http://schemas.microsoft.com/office/drawing/2014/main" id="{EE77592B-EE8B-614D-4160-CDFC7BCE80DB}"/>
+              </a:ext>
+            </a:extLst>
+          </p:cNvPr>
+          <p:cNvSpPr>
+            <a:spLocks noGrp="1"/>
+          </p:cNvSpPr>
+          <p:nvPr>
+            <p:ph idx="1"/>
+          </p:nvPr>
+        </p:nvSpPr>
+        <p:spPr>
+          <a:xfrm>
+            <a:off x="0" y="2084851"/>
+            <a:ext cx="12192000" cy="2404863"/>
+          </a:xfrm>
+        </p:spPr>
+        <p:txBody>
+          <a:bodyPr anchor="ctr">
+            <a:normAutofit/>
+          </a:bodyPr>
+          <a:lstStyle/>
+          <a:p>
+            <a:pPr algn="ctr">
+              <a:buNone/>
+            </a:pPr>
+            <a:r>
+              <a:rPr lang="zh-TW" altLang="en-US" sz="6600" b="1" dirty="0" smtClean="0">
+                <a:solidFill>
+                  <a:srgbClr val="000066"/>
+                </a:solidFill>
+                <a:latin typeface="微軟正黑體" pitchFamily="34" charset="-120"/>
+                <a:ea typeface="微軟正黑體" pitchFamily="34" charset="-120"/>
+              </a:rPr>
+              <a:t>宙</a:t>
+            </a:r>
+            <a:r>
+              <a:rPr lang="zh-TW" altLang="en-US" sz="6600" b="1" dirty="0">
+                <a:solidFill>
+                  <a:srgbClr val="000066"/>
+                </a:solidFill>
+                <a:latin typeface="微軟正黑體" pitchFamily="34" charset="-120"/>
+                <a:ea typeface="微軟正黑體" pitchFamily="34" charset="-120"/>
+              </a:rPr>
+              <a:t>大主宰  成為我救主</a:t>
+            </a:r>
+          </a:p>
+          <a:p>
+            <a:pPr algn="ctr">
+              <a:buNone/>
+            </a:pPr>
+            <a:r>
+              <a:rPr lang="zh-TW" altLang="en-US" sz="6600" b="1" dirty="0">
+                <a:solidFill>
+                  <a:srgbClr val="000066"/>
+                </a:solidFill>
+                <a:latin typeface="微軟正黑體" pitchFamily="34" charset="-120"/>
+                <a:ea typeface="微軟正黑體" pitchFamily="34" charset="-120"/>
+              </a:rPr>
+              <a:t>神一切豐盛  全在主裡</a:t>
+            </a:r>
+            <a:endParaRPr lang="zh-TW" altLang="en-US" sz="6600" b="1" dirty="0">
+              <a:solidFill>
+                <a:srgbClr val="000066"/>
+              </a:solidFill>
+              <a:latin typeface="微軟正黑體" pitchFamily="34" charset="-120"/>
+              <a:ea typeface="微軟正黑體" pitchFamily="34" charset="-120"/>
+            </a:endParaRPr>
+          </a:p>
+        </p:txBody>
+      </p:sp>
+    </p:spTree>
+    <p:extLst>
+      <p:ext uri="{BB962C8B-B14F-4D97-AF65-F5344CB8AC3E}">
+        <p14:creationId xmlns:p14="http://schemas.microsoft.com/office/powerpoint/2010/main" val="2274094690"/>
+      </p:ext>
+    </p:extLst>
   </p:cSld>
   <p:clrMapOvr>
     <a:masterClrMapping/>
@@ -3212,7 +3755,13 @@
   <p:cSld>
     <p:spTree>
       <p:nvGrpSpPr>
-        <p:cNvPr id="1" name=""/>
+        <p:cNvPr id="1" name="">
+          <a:extLst>
+            <a:ext uri="{FF2B5EF4-FFF2-40B4-BE49-F238E27FC236}">
+              <a16:creationId xmlns:a16="http://schemas.microsoft.com/office/drawing/2014/main" id="{499F6A04-361B-D03C-72FC-83746A3861FC}"/>
+            </a:ext>
+          </a:extLst>
+        </p:cNvPr>
         <p:cNvGrpSpPr/>
         <p:nvPr/>
       </p:nvGrpSpPr>
@@ -3226,32 +3775,61 @@
       </p:grpSpPr>
       <p:sp>
         <p:nvSpPr>
-          <p:cNvPr id="4" name="標題 3"/>
-          <p:cNvSpPr>
-            <a:spLocks noGrp="1"/>
-          </p:cNvSpPr>
-          <p:nvPr>
-            <p:ph type="title"/>
-          </p:nvPr>
-        </p:nvSpPr>
-        <p:spPr/>
-        <p:txBody>
-          <a:bodyPr>
+          <p:cNvPr id="5" name="內容版面配置區 4">
+            <a:extLst>
+              <a:ext uri="{FF2B5EF4-FFF2-40B4-BE49-F238E27FC236}">
+                <a16:creationId xmlns:a16="http://schemas.microsoft.com/office/drawing/2014/main" id="{EE77592B-EE8B-614D-4160-CDFC7BCE80DB}"/>
+              </a:ext>
+            </a:extLst>
+          </p:cNvPr>
+          <p:cNvSpPr>
+            <a:spLocks noGrp="1"/>
+          </p:cNvSpPr>
+          <p:nvPr>
+            <p:ph idx="1"/>
+          </p:nvPr>
+        </p:nvSpPr>
+        <p:spPr>
+          <a:xfrm>
+            <a:off x="0" y="2084851"/>
+            <a:ext cx="12192000" cy="2404863"/>
+          </a:xfrm>
+        </p:spPr>
+        <p:txBody>
+          <a:bodyPr anchor="ctr">
             <a:normAutofit/>
           </a:bodyPr>
           <a:lstStyle/>
           <a:p>
-            <a:r>
-              <a:rPr lang="zh-TW" altLang="en-US" b="1" dirty="0" smtClean="0">
+            <a:pPr lvl="0" algn="ctr">
+              <a:buNone/>
+            </a:pPr>
+            <a:r>
+              <a:rPr lang="zh-TW" altLang="en-US" sz="6600" b="1" dirty="0">
                 <a:solidFill>
                   <a:srgbClr val="000066"/>
                 </a:solidFill>
                 <a:latin typeface="微軟正黑體" pitchFamily="34" charset="-120"/>
                 <a:ea typeface="微軟正黑體" pitchFamily="34" charset="-120"/>
               </a:rPr>
-              <a:t>從榮耀降臨</a:t>
-            </a:r>
-            <a:endParaRPr lang="zh-TW" altLang="en-US" b="1" dirty="0">
+              <a:t>從榮耀降臨  永遠奇妙福音</a:t>
+            </a:r>
+          </a:p>
+          <a:p>
+            <a:pPr algn="ctr">
+              <a:buNone/>
+            </a:pPr>
+            <a:r>
+              <a:rPr lang="zh-TW" altLang="en-US" sz="6600" b="1" dirty="0">
+                <a:solidFill>
+                  <a:srgbClr val="000066"/>
+                </a:solidFill>
+                <a:latin typeface="微軟正黑體" pitchFamily="34" charset="-120"/>
+                <a:ea typeface="微軟正黑體" pitchFamily="34" charset="-120"/>
+              </a:rPr>
+              <a:t>我神我主降臨  耶穌是祂聖名</a:t>
+            </a:r>
+            <a:endParaRPr lang="en-US" altLang="zh-TW" sz="6600" b="1" dirty="0">
               <a:solidFill>
                 <a:srgbClr val="000066"/>
               </a:solidFill>
@@ -3263,102 +3841,89 @@
       </p:sp>
       <p:sp>
         <p:nvSpPr>
-          <p:cNvPr id="5" name="內容版面配置區 4"/>
-          <p:cNvSpPr>
-            <a:spLocks noGrp="1"/>
-          </p:cNvSpPr>
-          <p:nvPr>
-            <p:ph idx="1"/>
-          </p:nvPr>
+          <p:cNvPr id="3" name="TextBox 2">
+            <a:extLst>
+              <a:ext uri="{FF2B5EF4-FFF2-40B4-BE49-F238E27FC236}">
+                <a16:creationId xmlns:a16="http://schemas.microsoft.com/office/drawing/2014/main" id="{FA175DD0-F211-14DE-420F-4A50F79B6BD2}"/>
+              </a:ext>
+            </a:extLst>
+          </p:cNvPr>
+          <p:cNvSpPr txBox="1"/>
+          <p:nvPr/>
         </p:nvSpPr>
         <p:spPr>
           <a:xfrm>
-            <a:off x="1524000" y="1600201"/>
-            <a:ext cx="9144000" cy="4525963"/>
+            <a:off x="0" y="5157193"/>
+            <a:ext cx="12192000" cy="584775"/>
           </a:xfrm>
+          <a:prstGeom prst="rect">
+            <a:avLst/>
+          </a:prstGeom>
+          <a:noFill/>
         </p:spPr>
         <p:txBody>
-          <a:bodyPr>
-            <a:noAutofit/>
+          <a:bodyPr wrap="square" rtlCol="0">
+            <a:spAutoFit/>
           </a:bodyPr>
           <a:lstStyle/>
           <a:p>
-            <a:pPr algn="ctr">
-              <a:buNone/>
-            </a:pPr>
-            <a:r>
-              <a:rPr lang="zh-TW" altLang="en-US" sz="5400" b="1" dirty="0">
+            <a:pPr algn="ctr"/>
+            <a:r>
+              <a:rPr lang="en-US" sz="3200" b="1" dirty="0">
                 <a:solidFill>
                   <a:srgbClr val="000066"/>
                 </a:solidFill>
-                <a:latin typeface="微軟正黑體" pitchFamily="34" charset="-120"/>
-                <a:ea typeface="微軟正黑體" pitchFamily="34" charset="-120"/>
+                <a:latin typeface="+mj-lt"/>
+                <a:ea typeface="Microsoft JhengHei" panose="020B0604030504040204" pitchFamily="34" charset="-120"/>
               </a:rPr>
-              <a:t>我何等愛主  何等崇拜主</a:t>
-            </a:r>
-            <a:endParaRPr lang="en-US" altLang="zh-TW" sz="5400" b="1" dirty="0">
+              <a:t>( </a:t>
+            </a:r>
+            <a:r>
+              <a:rPr lang="en-US" altLang="zh-CN" sz="3200" b="1" dirty="0" smtClean="0">
+                <a:solidFill>
+                  <a:srgbClr val="000066"/>
+                </a:solidFill>
+                <a:latin typeface="+mj-lt"/>
+                <a:ea typeface="Microsoft JhengHei" panose="020B0604030504040204" pitchFamily="34" charset="-120"/>
+              </a:rPr>
+              <a:t>1 / 3</a:t>
+            </a:r>
+            <a:r>
+              <a:rPr lang="en-US" sz="3200" b="1" dirty="0" smtClean="0">
+                <a:solidFill>
+                  <a:srgbClr val="000066"/>
+                </a:solidFill>
+                <a:latin typeface="+mj-lt"/>
+                <a:ea typeface="Microsoft JhengHei" panose="020B0604030504040204" pitchFamily="34" charset="-120"/>
+              </a:rPr>
+              <a:t> </a:t>
+            </a:r>
+            <a:r>
+              <a:rPr lang="en-US" sz="3200" b="1" dirty="0">
+                <a:solidFill>
+                  <a:srgbClr val="000066"/>
+                </a:solidFill>
+                <a:latin typeface="+mj-lt"/>
+                <a:ea typeface="Microsoft JhengHei" panose="020B0604030504040204" pitchFamily="34" charset="-120"/>
+              </a:rPr>
+              <a:t>)</a:t>
+            </a:r>
+            <a:endParaRPr lang="vi-VN" sz="3200" b="1" dirty="0">
               <a:solidFill>
                 <a:srgbClr val="000066"/>
               </a:solidFill>
-              <a:latin typeface="微軟正黑體" pitchFamily="34" charset="-120"/>
-              <a:ea typeface="微軟正黑體" pitchFamily="34" charset="-120"/>
+              <a:latin typeface="+mj-lt"/>
+              <a:ea typeface="Microsoft JhengHei" panose="020B0604030504040204" pitchFamily="34" charset="-120"/>
             </a:endParaRPr>
           </a:p>
-          <a:p>
-            <a:pPr algn="ctr">
-              <a:buNone/>
-            </a:pPr>
-            <a:r>
-              <a:rPr lang="zh-TW" altLang="en-US" sz="5400" b="1" dirty="0">
-                <a:solidFill>
-                  <a:srgbClr val="000066"/>
-                </a:solidFill>
-                <a:latin typeface="微軟正黑體" pitchFamily="34" charset="-120"/>
-                <a:ea typeface="微軟正黑體" pitchFamily="34" charset="-120"/>
-              </a:rPr>
-              <a:t>我生命亮光  我的一切</a:t>
-            </a:r>
-            <a:endParaRPr lang="en-US" altLang="zh-TW" sz="5400" b="1" dirty="0">
-              <a:solidFill>
-                <a:srgbClr val="000066"/>
-              </a:solidFill>
-              <a:latin typeface="微軟正黑體" pitchFamily="34" charset="-120"/>
-              <a:ea typeface="微軟正黑體" pitchFamily="34" charset="-120"/>
-            </a:endParaRPr>
-          </a:p>
-          <a:p>
-            <a:pPr algn="ctr">
-              <a:buNone/>
-            </a:pPr>
-            <a:r>
-              <a:rPr lang="zh-TW" altLang="en-US" sz="5400" b="1" dirty="0">
-                <a:solidFill>
-                  <a:srgbClr val="000066"/>
-                </a:solidFill>
-                <a:latin typeface="微軟正黑體" pitchFamily="34" charset="-120"/>
-                <a:ea typeface="微軟正黑體" pitchFamily="34" charset="-120"/>
-              </a:rPr>
-              <a:t>宙大主宰  成為我救主</a:t>
-            </a:r>
-          </a:p>
-          <a:p>
-            <a:pPr algn="ctr">
-              <a:buNone/>
-            </a:pPr>
-            <a:r>
-              <a:rPr lang="zh-TW" altLang="en-US" sz="5400" b="1" dirty="0">
-                <a:solidFill>
-                  <a:srgbClr val="000066"/>
-                </a:solidFill>
-                <a:latin typeface="微軟正黑體" pitchFamily="34" charset="-120"/>
-                <a:ea typeface="微軟正黑體" pitchFamily="34" charset="-120"/>
-              </a:rPr>
-              <a:t>神一切豐盛  全在主裡</a:t>
-            </a:r>
-          </a:p>
         </p:txBody>
       </p:sp>
     </p:spTree>
+    <p:extLst>
+      <p:ext uri="{BB962C8B-B14F-4D97-AF65-F5344CB8AC3E}">
+        <p14:creationId xmlns:p14="http://schemas.microsoft.com/office/powerpoint/2010/main" val="209324612"/>
+      </p:ext>
+    </p:extLst>
   </p:cSld>
   <p:clrMapOvr>
     <a:masterClrMapping/>
@@ -3371,7 +3936,13 @@
   <p:cSld>
     <p:spTree>
       <p:nvGrpSpPr>
-        <p:cNvPr id="1" name=""/>
+        <p:cNvPr id="1" name="">
+          <a:extLst>
+            <a:ext uri="{FF2B5EF4-FFF2-40B4-BE49-F238E27FC236}">
+              <a16:creationId xmlns:a16="http://schemas.microsoft.com/office/drawing/2014/main" id="{499F6A04-361B-D03C-72FC-83746A3861FC}"/>
+            </a:ext>
+          </a:extLst>
+        </p:cNvPr>
         <p:cNvGrpSpPr/>
         <p:nvPr/>
       </p:nvGrpSpPr>
@@ -3385,32 +3956,61 @@
       </p:grpSpPr>
       <p:sp>
         <p:nvSpPr>
-          <p:cNvPr id="4" name="標題 3"/>
-          <p:cNvSpPr>
-            <a:spLocks noGrp="1"/>
-          </p:cNvSpPr>
-          <p:nvPr>
-            <p:ph type="title"/>
-          </p:nvPr>
-        </p:nvSpPr>
-        <p:spPr/>
-        <p:txBody>
-          <a:bodyPr>
+          <p:cNvPr id="5" name="內容版面配置區 4">
+            <a:extLst>
+              <a:ext uri="{FF2B5EF4-FFF2-40B4-BE49-F238E27FC236}">
+                <a16:creationId xmlns:a16="http://schemas.microsoft.com/office/drawing/2014/main" id="{EE77592B-EE8B-614D-4160-CDFC7BCE80DB}"/>
+              </a:ext>
+            </a:extLst>
+          </p:cNvPr>
+          <p:cNvSpPr>
+            <a:spLocks noGrp="1"/>
+          </p:cNvSpPr>
+          <p:nvPr>
+            <p:ph idx="1"/>
+          </p:nvPr>
+        </p:nvSpPr>
+        <p:spPr>
+          <a:xfrm>
+            <a:off x="0" y="2084851"/>
+            <a:ext cx="12192000" cy="2404863"/>
+          </a:xfrm>
+        </p:spPr>
+        <p:txBody>
+          <a:bodyPr anchor="ctr">
             <a:normAutofit/>
           </a:bodyPr>
           <a:lstStyle/>
           <a:p>
-            <a:r>
-              <a:rPr lang="zh-TW" altLang="en-US" b="1" dirty="0" smtClean="0">
+            <a:pPr algn="ctr">
+              <a:buNone/>
+            </a:pPr>
+            <a:r>
+              <a:rPr lang="zh-TW" altLang="en-US" sz="6600" b="1" dirty="0">
                 <a:solidFill>
                   <a:srgbClr val="000066"/>
                 </a:solidFill>
                 <a:latin typeface="微軟正黑體" pitchFamily="34" charset="-120"/>
                 <a:ea typeface="微軟正黑體" pitchFamily="34" charset="-120"/>
               </a:rPr>
-              <a:t>從榮耀降臨</a:t>
-            </a:r>
-            <a:endParaRPr lang="zh-TW" altLang="en-US" b="1" dirty="0">
+              <a:t>生在馬槽裡  世人看為客旅</a:t>
+            </a:r>
+          </a:p>
+          <a:p>
+            <a:pPr algn="ctr">
+              <a:buNone/>
+            </a:pPr>
+            <a:r>
+              <a:rPr lang="zh-TW" altLang="en-US" sz="6600" b="1" dirty="0">
+                <a:solidFill>
+                  <a:srgbClr val="000066"/>
+                </a:solidFill>
+                <a:latin typeface="微軟正黑體" pitchFamily="34" charset="-120"/>
+                <a:ea typeface="微軟正黑體" pitchFamily="34" charset="-120"/>
+              </a:rPr>
+              <a:t>在世受盡悲傷  流淚  飄零</a:t>
+            </a:r>
+            <a:endParaRPr lang="zh-TW" altLang="en-US" sz="6600" b="1" dirty="0">
               <a:solidFill>
                 <a:srgbClr val="000066"/>
               </a:solidFill>
@@ -3422,102 +4022,89 @@
       </p:sp>
       <p:sp>
         <p:nvSpPr>
-          <p:cNvPr id="5" name="內容版面配置區 4"/>
-          <p:cNvSpPr>
-            <a:spLocks noGrp="1"/>
-          </p:cNvSpPr>
-          <p:nvPr>
-            <p:ph idx="1"/>
-          </p:nvPr>
+          <p:cNvPr id="3" name="TextBox 2">
+            <a:extLst>
+              <a:ext uri="{FF2B5EF4-FFF2-40B4-BE49-F238E27FC236}">
+                <a16:creationId xmlns:a16="http://schemas.microsoft.com/office/drawing/2014/main" id="{FA175DD0-F211-14DE-420F-4A50F79B6BD2}"/>
+              </a:ext>
+            </a:extLst>
+          </p:cNvPr>
+          <p:cNvSpPr txBox="1"/>
+          <p:nvPr/>
         </p:nvSpPr>
         <p:spPr>
           <a:xfrm>
-            <a:off x="1524000" y="1600201"/>
-            <a:ext cx="9144000" cy="4525963"/>
+            <a:off x="0" y="5157193"/>
+            <a:ext cx="12192000" cy="584775"/>
           </a:xfrm>
+          <a:prstGeom prst="rect">
+            <a:avLst/>
+          </a:prstGeom>
+          <a:noFill/>
         </p:spPr>
         <p:txBody>
-          <a:bodyPr>
-            <a:noAutofit/>
+          <a:bodyPr wrap="square" rtlCol="0">
+            <a:spAutoFit/>
           </a:bodyPr>
           <a:lstStyle/>
           <a:p>
-            <a:pPr lvl="0" algn="ctr">
-              <a:buNone/>
-            </a:pPr>
-            <a:r>
-              <a:rPr lang="zh-TW" altLang="en-US" sz="5400" b="1" dirty="0">
+            <a:pPr algn="ctr"/>
+            <a:r>
+              <a:rPr lang="en-US" sz="3200" b="1" dirty="0">
                 <a:solidFill>
                   <a:srgbClr val="000066"/>
                 </a:solidFill>
-                <a:latin typeface="微軟正黑體" pitchFamily="34" charset="-120"/>
-                <a:ea typeface="微軟正黑體" pitchFamily="34" charset="-120"/>
+                <a:latin typeface="+mj-lt"/>
+                <a:ea typeface="Microsoft JhengHei" panose="020B0604030504040204" pitchFamily="34" charset="-120"/>
               </a:rPr>
-              <a:t>主卑微順服  使我們得救贖</a:t>
-            </a:r>
-            <a:endParaRPr lang="en-US" altLang="zh-TW" sz="5400" b="1" dirty="0">
+              <a:t>( </a:t>
+            </a:r>
+            <a:r>
+              <a:rPr lang="en-US" altLang="zh-CN" sz="3200" b="1" dirty="0" smtClean="0">
+                <a:solidFill>
+                  <a:srgbClr val="000066"/>
+                </a:solidFill>
+                <a:latin typeface="+mj-lt"/>
+                <a:ea typeface="Microsoft JhengHei" panose="020B0604030504040204" pitchFamily="34" charset="-120"/>
+              </a:rPr>
+              <a:t>1 / 3</a:t>
+            </a:r>
+            <a:r>
+              <a:rPr lang="en-US" sz="3200" b="1" dirty="0" smtClean="0">
+                <a:solidFill>
+                  <a:srgbClr val="000066"/>
+                </a:solidFill>
+                <a:latin typeface="+mj-lt"/>
+                <a:ea typeface="Microsoft JhengHei" panose="020B0604030504040204" pitchFamily="34" charset="-120"/>
+              </a:rPr>
+              <a:t> </a:t>
+            </a:r>
+            <a:r>
+              <a:rPr lang="en-US" sz="3200" b="1" dirty="0">
+                <a:solidFill>
+                  <a:srgbClr val="000066"/>
+                </a:solidFill>
+                <a:latin typeface="+mj-lt"/>
+                <a:ea typeface="Microsoft JhengHei" panose="020B0604030504040204" pitchFamily="34" charset="-120"/>
+              </a:rPr>
+              <a:t>)</a:t>
+            </a:r>
+            <a:endParaRPr lang="vi-VN" sz="3200" b="1" dirty="0">
               <a:solidFill>
                 <a:srgbClr val="000066"/>
               </a:solidFill>
-              <a:latin typeface="微軟正黑體" pitchFamily="34" charset="-120"/>
-              <a:ea typeface="微軟正黑體" pitchFamily="34" charset="-120"/>
+              <a:latin typeface="+mj-lt"/>
+              <a:ea typeface="Microsoft JhengHei" panose="020B0604030504040204" pitchFamily="34" charset="-120"/>
             </a:endParaRPr>
           </a:p>
-          <a:p>
-            <a:pPr lvl="0" algn="ctr">
-              <a:buNone/>
-            </a:pPr>
-            <a:r>
-              <a:rPr lang="zh-TW" altLang="en-US" sz="5400" b="1" dirty="0">
-                <a:solidFill>
-                  <a:srgbClr val="000066"/>
-                </a:solidFill>
-                <a:latin typeface="微軟正黑體" pitchFamily="34" charset="-120"/>
-                <a:ea typeface="微軟正黑體" pitchFamily="34" charset="-120"/>
-              </a:rPr>
-              <a:t>雖在黑夜茫茫  毫無半點指望</a:t>
-            </a:r>
-            <a:endParaRPr lang="en-US" altLang="zh-TW" sz="5400" b="1" dirty="0">
-              <a:solidFill>
-                <a:srgbClr val="000066"/>
-              </a:solidFill>
-              <a:latin typeface="微軟正黑體" pitchFamily="34" charset="-120"/>
-              <a:ea typeface="微軟正黑體" pitchFamily="34" charset="-120"/>
-            </a:endParaRPr>
-          </a:p>
-          <a:p>
-            <a:pPr algn="ctr">
-              <a:buNone/>
-            </a:pPr>
-            <a:r>
-              <a:rPr lang="zh-TW" altLang="en-US" sz="5400" b="1" dirty="0">
-                <a:solidFill>
-                  <a:srgbClr val="000066"/>
-                </a:solidFill>
-                <a:latin typeface="微軟正黑體" pitchFamily="34" charset="-120"/>
-                <a:ea typeface="微軟正黑體" pitchFamily="34" charset="-120"/>
-              </a:rPr>
-              <a:t>但慈悲上主  甘願離榮光處</a:t>
-            </a:r>
-          </a:p>
-          <a:p>
-            <a:pPr algn="ctr">
-              <a:buNone/>
-            </a:pPr>
-            <a:r>
-              <a:rPr lang="zh-TW" altLang="en-US" sz="5400" b="1" dirty="0">
-                <a:solidFill>
-                  <a:srgbClr val="000066"/>
-                </a:solidFill>
-                <a:latin typeface="微軟正黑體" pitchFamily="34" charset="-120"/>
-                <a:ea typeface="微軟正黑體" pitchFamily="34" charset="-120"/>
-              </a:rPr>
-              <a:t>降世救贖我靈魂免滅亡</a:t>
-            </a:r>
-          </a:p>
         </p:txBody>
       </p:sp>
     </p:spTree>
+    <p:extLst>
+      <p:ext uri="{BB962C8B-B14F-4D97-AF65-F5344CB8AC3E}">
+        <p14:creationId xmlns:p14="http://schemas.microsoft.com/office/powerpoint/2010/main" val="2244742593"/>
+      </p:ext>
+    </p:extLst>
   </p:cSld>
   <p:clrMapOvr>
     <a:masterClrMapping/>
@@ -3530,7 +4117,13 @@
   <p:cSld>
     <p:spTree>
       <p:nvGrpSpPr>
-        <p:cNvPr id="1" name=""/>
+        <p:cNvPr id="1" name="">
+          <a:extLst>
+            <a:ext uri="{FF2B5EF4-FFF2-40B4-BE49-F238E27FC236}">
+              <a16:creationId xmlns:a16="http://schemas.microsoft.com/office/drawing/2014/main" id="{499F6A04-361B-D03C-72FC-83746A3861FC}"/>
+            </a:ext>
+          </a:extLst>
+        </p:cNvPr>
         <p:cNvGrpSpPr/>
         <p:nvPr/>
       </p:nvGrpSpPr>
@@ -3544,32 +4137,46 @@
       </p:grpSpPr>
       <p:sp>
         <p:nvSpPr>
-          <p:cNvPr id="4" name="標題 3"/>
-          <p:cNvSpPr>
-            <a:spLocks noGrp="1"/>
-          </p:cNvSpPr>
-          <p:nvPr>
-            <p:ph type="title"/>
-          </p:nvPr>
-        </p:nvSpPr>
-        <p:spPr/>
-        <p:txBody>
-          <a:bodyPr>
+          <p:cNvPr id="5" name="內容版面配置區 4">
+            <a:extLst>
+              <a:ext uri="{FF2B5EF4-FFF2-40B4-BE49-F238E27FC236}">
+                <a16:creationId xmlns:a16="http://schemas.microsoft.com/office/drawing/2014/main" id="{EE77592B-EE8B-614D-4160-CDFC7BCE80DB}"/>
+              </a:ext>
+            </a:extLst>
+          </p:cNvPr>
+          <p:cNvSpPr>
+            <a:spLocks noGrp="1"/>
+          </p:cNvSpPr>
+          <p:nvPr>
+            <p:ph idx="1"/>
+          </p:nvPr>
+        </p:nvSpPr>
+        <p:spPr>
+          <a:xfrm>
+            <a:off x="0" y="2084851"/>
+            <a:ext cx="12192000" cy="2404863"/>
+          </a:xfrm>
+        </p:spPr>
+        <p:txBody>
+          <a:bodyPr anchor="ctr">
             <a:normAutofit/>
           </a:bodyPr>
           <a:lstStyle/>
           <a:p>
-            <a:r>
-              <a:rPr lang="zh-TW" altLang="en-US" b="1" dirty="0" smtClean="0">
+            <a:pPr algn="ctr">
+              <a:buNone/>
+            </a:pPr>
+            <a:r>
+              <a:rPr lang="zh-TW" altLang="en-US" sz="6600" b="1" dirty="0">
                 <a:solidFill>
                   <a:srgbClr val="000066"/>
                 </a:solidFill>
                 <a:latin typeface="微軟正黑體" pitchFamily="34" charset="-120"/>
                 <a:ea typeface="微軟正黑體" pitchFamily="34" charset="-120"/>
               </a:rPr>
-              <a:t>從榮耀降臨</a:t>
-            </a:r>
-            <a:endParaRPr lang="zh-TW" altLang="en-US" b="1" dirty="0">
+              <a:t>我何等愛主  何等崇拜主</a:t>
+            </a:r>
+            <a:endParaRPr lang="en-US" altLang="zh-TW" sz="6600" b="1" dirty="0">
               <a:solidFill>
                 <a:srgbClr val="000066"/>
               </a:solidFill>
@@ -3577,44 +4184,21 @@
               <a:ea typeface="微軟正黑體" pitchFamily="34" charset="-120"/>
             </a:endParaRPr>
           </a:p>
-        </p:txBody>
-      </p:sp>
-      <p:sp>
-        <p:nvSpPr>
-          <p:cNvPr id="5" name="內容版面配置區 4"/>
-          <p:cNvSpPr>
-            <a:spLocks noGrp="1"/>
-          </p:cNvSpPr>
-          <p:nvPr>
-            <p:ph idx="1"/>
-          </p:nvPr>
-        </p:nvSpPr>
-        <p:spPr>
-          <a:xfrm>
-            <a:off x="1524000" y="1600201"/>
-            <a:ext cx="9144000" cy="4525963"/>
-          </a:xfrm>
-        </p:spPr>
-        <p:txBody>
-          <a:bodyPr>
-            <a:noAutofit/>
-          </a:bodyPr>
-          <a:lstStyle/>
           <a:p>
             <a:pPr algn="ctr">
               <a:buNone/>
             </a:pPr>
             <a:r>
-              <a:rPr lang="zh-TW" altLang="en-US" sz="5400" b="1" dirty="0">
+              <a:rPr lang="zh-TW" altLang="en-US" sz="6600" b="1" dirty="0">
                 <a:solidFill>
                   <a:srgbClr val="000066"/>
                 </a:solidFill>
                 <a:latin typeface="微軟正黑體" pitchFamily="34" charset="-120"/>
                 <a:ea typeface="微軟正黑體" pitchFamily="34" charset="-120"/>
               </a:rPr>
-              <a:t>我何等愛主  何等崇拜主</a:t>
-            </a:r>
-            <a:endParaRPr lang="en-US" altLang="zh-TW" sz="5400" b="1" dirty="0">
+              <a:t>我生命亮光  我的一切</a:t>
+            </a:r>
+            <a:endParaRPr lang="zh-TW" altLang="en-US" sz="6600" b="1" dirty="0">
               <a:solidFill>
                 <a:srgbClr val="000066"/>
               </a:solidFill>
@@ -3622,61 +4206,14 @@
               <a:ea typeface="微軟正黑體" pitchFamily="34" charset="-120"/>
             </a:endParaRPr>
           </a:p>
-          <a:p>
-            <a:pPr algn="ctr">
-              <a:buNone/>
-            </a:pPr>
-            <a:r>
-              <a:rPr lang="zh-TW" altLang="en-US" sz="5400" b="1" dirty="0">
-                <a:solidFill>
-                  <a:srgbClr val="000066"/>
-                </a:solidFill>
-                <a:latin typeface="微軟正黑體" pitchFamily="34" charset="-120"/>
-                <a:ea typeface="微軟正黑體" pitchFamily="34" charset="-120"/>
-              </a:rPr>
-              <a:t>我生命亮光  我的一切</a:t>
-            </a:r>
-            <a:endParaRPr lang="en-US" altLang="zh-TW" sz="5400" b="1" dirty="0">
-              <a:solidFill>
-                <a:srgbClr val="000066"/>
-              </a:solidFill>
-              <a:latin typeface="微軟正黑體" pitchFamily="34" charset="-120"/>
-              <a:ea typeface="微軟正黑體" pitchFamily="34" charset="-120"/>
-            </a:endParaRPr>
-          </a:p>
-          <a:p>
-            <a:pPr algn="ctr">
-              <a:buNone/>
-            </a:pPr>
-            <a:r>
-              <a:rPr lang="zh-TW" altLang="en-US" sz="5400" b="1" dirty="0">
-                <a:solidFill>
-                  <a:srgbClr val="000066"/>
-                </a:solidFill>
-                <a:latin typeface="微軟正黑體" pitchFamily="34" charset="-120"/>
-                <a:ea typeface="微軟正黑體" pitchFamily="34" charset="-120"/>
-              </a:rPr>
-              <a:t>宙大主宰  成為我救主</a:t>
-            </a:r>
-          </a:p>
-          <a:p>
-            <a:pPr algn="ctr">
-              <a:buNone/>
-            </a:pPr>
-            <a:r>
-              <a:rPr lang="zh-TW" altLang="en-US" sz="5400" b="1" dirty="0">
-                <a:solidFill>
-                  <a:srgbClr val="000066"/>
-                </a:solidFill>
-                <a:latin typeface="微軟正黑體" pitchFamily="34" charset="-120"/>
-                <a:ea typeface="微軟正黑體" pitchFamily="34" charset="-120"/>
-              </a:rPr>
-              <a:t>神一切豐盛  全在主裡</a:t>
-            </a:r>
-          </a:p>
         </p:txBody>
       </p:sp>
     </p:spTree>
+    <p:extLst>
+      <p:ext uri="{BB962C8B-B14F-4D97-AF65-F5344CB8AC3E}">
+        <p14:creationId xmlns:p14="http://schemas.microsoft.com/office/powerpoint/2010/main" val="3522686159"/>
+      </p:ext>
+    </p:extLst>
   </p:cSld>
   <p:clrMapOvr>
     <a:masterClrMapping/>
@@ -3689,7 +4226,13 @@
   <p:cSld>
     <p:spTree>
       <p:nvGrpSpPr>
-        <p:cNvPr id="1" name=""/>
+        <p:cNvPr id="1" name="">
+          <a:extLst>
+            <a:ext uri="{FF2B5EF4-FFF2-40B4-BE49-F238E27FC236}">
+              <a16:creationId xmlns:a16="http://schemas.microsoft.com/office/drawing/2014/main" id="{499F6A04-361B-D03C-72FC-83746A3861FC}"/>
+            </a:ext>
+          </a:extLst>
+        </p:cNvPr>
         <p:cNvGrpSpPr/>
         <p:nvPr/>
       </p:nvGrpSpPr>
@@ -3703,32 +4246,71 @@
       </p:grpSpPr>
       <p:sp>
         <p:nvSpPr>
-          <p:cNvPr id="4" name="標題 3"/>
-          <p:cNvSpPr>
-            <a:spLocks noGrp="1"/>
-          </p:cNvSpPr>
-          <p:nvPr>
-            <p:ph type="title"/>
-          </p:nvPr>
-        </p:nvSpPr>
-        <p:spPr/>
-        <p:txBody>
-          <a:bodyPr>
+          <p:cNvPr id="5" name="內容版面配置區 4">
+            <a:extLst>
+              <a:ext uri="{FF2B5EF4-FFF2-40B4-BE49-F238E27FC236}">
+                <a16:creationId xmlns:a16="http://schemas.microsoft.com/office/drawing/2014/main" id="{EE77592B-EE8B-614D-4160-CDFC7BCE80DB}"/>
+              </a:ext>
+            </a:extLst>
+          </p:cNvPr>
+          <p:cNvSpPr>
+            <a:spLocks noGrp="1"/>
+          </p:cNvSpPr>
+          <p:nvPr>
+            <p:ph idx="1"/>
+          </p:nvPr>
+        </p:nvSpPr>
+        <p:spPr>
+          <a:xfrm>
+            <a:off x="0" y="2084851"/>
+            <a:ext cx="12192000" cy="2404863"/>
+          </a:xfrm>
+        </p:spPr>
+        <p:txBody>
+          <a:bodyPr anchor="ctr">
             <a:normAutofit/>
           </a:bodyPr>
           <a:lstStyle/>
           <a:p>
-            <a:r>
-              <a:rPr lang="zh-TW" altLang="en-US" b="1" dirty="0" smtClean="0">
+            <a:pPr algn="ctr">
+              <a:buNone/>
+            </a:pPr>
+            <a:r>
+              <a:rPr lang="zh-TW" altLang="en-US" sz="6600" b="1" dirty="0" smtClean="0">
                 <a:solidFill>
                   <a:srgbClr val="000066"/>
                 </a:solidFill>
                 <a:latin typeface="微軟正黑體" pitchFamily="34" charset="-120"/>
                 <a:ea typeface="微軟正黑體" pitchFamily="34" charset="-120"/>
               </a:rPr>
-              <a:t>從榮耀降臨</a:t>
-            </a:r>
-            <a:endParaRPr lang="zh-TW" altLang="en-US" b="1" dirty="0">
+              <a:t>宙</a:t>
+            </a:r>
+            <a:r>
+              <a:rPr lang="zh-TW" altLang="en-US" sz="6600" b="1" dirty="0">
+                <a:solidFill>
+                  <a:srgbClr val="000066"/>
+                </a:solidFill>
+                <a:latin typeface="微軟正黑體" pitchFamily="34" charset="-120"/>
+                <a:ea typeface="微軟正黑體" pitchFamily="34" charset="-120"/>
+              </a:rPr>
+              <a:t>大主宰  成為我救主</a:t>
+            </a:r>
+          </a:p>
+          <a:p>
+            <a:pPr algn="ctr">
+              <a:buNone/>
+            </a:pPr>
+            <a:r>
+              <a:rPr lang="zh-TW" altLang="en-US" sz="6600" b="1" dirty="0">
+                <a:solidFill>
+                  <a:srgbClr val="000066"/>
+                </a:solidFill>
+                <a:latin typeface="微軟正黑體" pitchFamily="34" charset="-120"/>
+                <a:ea typeface="微軟正黑體" pitchFamily="34" charset="-120"/>
+              </a:rPr>
+              <a:t>神一切豐盛  全在主裡</a:t>
+            </a:r>
+            <a:endParaRPr lang="zh-TW" altLang="en-US" sz="6600" b="1" dirty="0">
               <a:solidFill>
                 <a:srgbClr val="000066"/>
               </a:solidFill>
@@ -3738,111 +4320,12 @@
           </a:p>
         </p:txBody>
       </p:sp>
-      <p:sp>
-        <p:nvSpPr>
-          <p:cNvPr id="5" name="內容版面配置區 4"/>
-          <p:cNvSpPr>
-            <a:spLocks noGrp="1"/>
-          </p:cNvSpPr>
-          <p:nvPr>
-            <p:ph idx="1"/>
-          </p:nvPr>
-        </p:nvSpPr>
-        <p:spPr>
-          <a:xfrm>
-            <a:off x="1524000" y="1600201"/>
-            <a:ext cx="9144000" cy="4525963"/>
-          </a:xfrm>
-        </p:spPr>
-        <p:txBody>
-          <a:bodyPr>
-            <a:noAutofit/>
-          </a:bodyPr>
-          <a:lstStyle/>
-          <a:p>
-            <a:pPr lvl="0" algn="ctr">
-              <a:buNone/>
-            </a:pPr>
-            <a:r>
-              <a:rPr lang="zh-TW" altLang="en-US" sz="5400" b="1" dirty="0">
-                <a:solidFill>
-                  <a:srgbClr val="000066"/>
-                </a:solidFill>
-                <a:latin typeface="微軟正黑體" pitchFamily="34" charset="-120"/>
-                <a:ea typeface="微軟正黑體" pitchFamily="34" charset="-120"/>
-              </a:rPr>
-              <a:t>主甘心樂意  道成血肉身體</a:t>
-            </a:r>
-            <a:endParaRPr lang="en-US" altLang="zh-TW" sz="5400" b="1" dirty="0">
-              <a:solidFill>
-                <a:srgbClr val="000066"/>
-              </a:solidFill>
-              <a:latin typeface="微軟正黑體" pitchFamily="34" charset="-120"/>
-              <a:ea typeface="微軟正黑體" pitchFamily="34" charset="-120"/>
-            </a:endParaRPr>
-          </a:p>
-          <a:p>
-            <a:pPr lvl="0" algn="ctr">
-              <a:buNone/>
-            </a:pPr>
-            <a:r>
-              <a:rPr lang="zh-TW" altLang="en-US" sz="5400" b="1" dirty="0">
-                <a:solidFill>
-                  <a:srgbClr val="000066"/>
-                </a:solidFill>
-                <a:latin typeface="微軟正黑體" pitchFamily="34" charset="-120"/>
-                <a:ea typeface="微軟正黑體" pitchFamily="34" charset="-120"/>
-              </a:rPr>
-              <a:t>取了世人樣式  顯明隱藏美旨</a:t>
-            </a:r>
-            <a:endParaRPr lang="en-US" altLang="zh-TW" sz="5400" b="1" dirty="0">
-              <a:solidFill>
-                <a:srgbClr val="000066"/>
-              </a:solidFill>
-              <a:latin typeface="微軟正黑體" pitchFamily="34" charset="-120"/>
-              <a:ea typeface="微軟正黑體" pitchFamily="34" charset="-120"/>
-            </a:endParaRPr>
-          </a:p>
-          <a:p>
-            <a:pPr lvl="0" algn="ctr">
-              <a:buNone/>
-            </a:pPr>
-            <a:r>
-              <a:rPr lang="zh-TW" altLang="en-US" sz="5400" b="1" dirty="0">
-                <a:solidFill>
-                  <a:srgbClr val="000066"/>
-                </a:solidFill>
-                <a:latin typeface="微軟正黑體" pitchFamily="34" charset="-120"/>
-                <a:ea typeface="微軟正黑體" pitchFamily="34" charset="-120"/>
-              </a:rPr>
-              <a:t>榮耀的奧祕  加略山的燔祭</a:t>
-            </a:r>
-            <a:endParaRPr lang="en-US" altLang="zh-TW" sz="5400" b="1" dirty="0">
-              <a:solidFill>
-                <a:srgbClr val="000066"/>
-              </a:solidFill>
-              <a:latin typeface="微軟正黑體" pitchFamily="34" charset="-120"/>
-              <a:ea typeface="微軟正黑體" pitchFamily="34" charset="-120"/>
-            </a:endParaRPr>
-          </a:p>
-          <a:p>
-            <a:pPr lvl="0" algn="ctr">
-              <a:buNone/>
-            </a:pPr>
-            <a:r>
-              <a:rPr lang="zh-TW" altLang="en-US" sz="5400" b="1" dirty="0">
-                <a:solidFill>
-                  <a:srgbClr val="000066"/>
-                </a:solidFill>
-                <a:latin typeface="微軟正黑體" pitchFamily="34" charset="-120"/>
-                <a:ea typeface="微軟正黑體" pitchFamily="34" charset="-120"/>
-              </a:rPr>
-              <a:t>自有永有的神偉大無比</a:t>
-            </a:r>
-          </a:p>
-        </p:txBody>
-      </p:sp>
     </p:spTree>
+    <p:extLst>
+      <p:ext uri="{BB962C8B-B14F-4D97-AF65-F5344CB8AC3E}">
+        <p14:creationId xmlns:p14="http://schemas.microsoft.com/office/powerpoint/2010/main" val="399416422"/>
+      </p:ext>
+    </p:extLst>
   </p:cSld>
   <p:clrMapOvr>
     <a:masterClrMapping/>
@@ -3855,7 +4338,13 @@
   <p:cSld>
     <p:spTree>
       <p:nvGrpSpPr>
-        <p:cNvPr id="1" name=""/>
+        <p:cNvPr id="1" name="">
+          <a:extLst>
+            <a:ext uri="{FF2B5EF4-FFF2-40B4-BE49-F238E27FC236}">
+              <a16:creationId xmlns:a16="http://schemas.microsoft.com/office/drawing/2014/main" id="{499F6A04-361B-D03C-72FC-83746A3861FC}"/>
+            </a:ext>
+          </a:extLst>
+        </p:cNvPr>
         <p:cNvGrpSpPr/>
         <p:nvPr/>
       </p:nvGrpSpPr>
@@ -3869,32 +4358,46 @@
       </p:grpSpPr>
       <p:sp>
         <p:nvSpPr>
-          <p:cNvPr id="4" name="標題 3"/>
-          <p:cNvSpPr>
-            <a:spLocks noGrp="1"/>
-          </p:cNvSpPr>
-          <p:nvPr>
-            <p:ph type="title"/>
-          </p:nvPr>
-        </p:nvSpPr>
-        <p:spPr/>
-        <p:txBody>
-          <a:bodyPr>
+          <p:cNvPr id="5" name="內容版面配置區 4">
+            <a:extLst>
+              <a:ext uri="{FF2B5EF4-FFF2-40B4-BE49-F238E27FC236}">
+                <a16:creationId xmlns:a16="http://schemas.microsoft.com/office/drawing/2014/main" id="{EE77592B-EE8B-614D-4160-CDFC7BCE80DB}"/>
+              </a:ext>
+            </a:extLst>
+          </p:cNvPr>
+          <p:cNvSpPr>
+            <a:spLocks noGrp="1"/>
+          </p:cNvSpPr>
+          <p:nvPr>
+            <p:ph idx="1"/>
+          </p:nvPr>
+        </p:nvSpPr>
+        <p:spPr>
+          <a:xfrm>
+            <a:off x="0" y="2084851"/>
+            <a:ext cx="12192000" cy="2404863"/>
+          </a:xfrm>
+        </p:spPr>
+        <p:txBody>
+          <a:bodyPr anchor="ctr">
             <a:normAutofit/>
           </a:bodyPr>
           <a:lstStyle/>
           <a:p>
-            <a:r>
-              <a:rPr lang="zh-TW" altLang="en-US" b="1" dirty="0" smtClean="0">
+            <a:pPr lvl="0" algn="ctr">
+              <a:buNone/>
+            </a:pPr>
+            <a:r>
+              <a:rPr lang="zh-TW" altLang="en-US" sz="6600" b="1" dirty="0">
                 <a:solidFill>
                   <a:srgbClr val="000066"/>
                 </a:solidFill>
                 <a:latin typeface="微軟正黑體" pitchFamily="34" charset="-120"/>
                 <a:ea typeface="微軟正黑體" pitchFamily="34" charset="-120"/>
               </a:rPr>
-              <a:t>從榮耀降臨</a:t>
-            </a:r>
-            <a:endParaRPr lang="zh-TW" altLang="en-US" b="1" dirty="0">
+              <a:t>主卑微順服  使我們得救贖</a:t>
+            </a:r>
+            <a:endParaRPr lang="en-US" altLang="zh-TW" sz="6600" b="1" dirty="0">
               <a:solidFill>
                 <a:srgbClr val="000066"/>
               </a:solidFill>
@@ -3902,44 +4405,21 @@
               <a:ea typeface="微軟正黑體" pitchFamily="34" charset="-120"/>
             </a:endParaRPr>
           </a:p>
-        </p:txBody>
-      </p:sp>
-      <p:sp>
-        <p:nvSpPr>
-          <p:cNvPr id="5" name="內容版面配置區 4"/>
-          <p:cNvSpPr>
-            <a:spLocks noGrp="1"/>
-          </p:cNvSpPr>
-          <p:nvPr>
-            <p:ph idx="1"/>
-          </p:nvPr>
-        </p:nvSpPr>
-        <p:spPr>
-          <a:xfrm>
-            <a:off x="1524000" y="1600201"/>
-            <a:ext cx="9144000" cy="4525963"/>
-          </a:xfrm>
-        </p:spPr>
-        <p:txBody>
-          <a:bodyPr>
-            <a:noAutofit/>
-          </a:bodyPr>
-          <a:lstStyle/>
-          <a:p>
-            <a:pPr algn="ctr">
+          <a:p>
+            <a:pPr lvl="0" algn="ctr">
               <a:buNone/>
             </a:pPr>
             <a:r>
-              <a:rPr lang="zh-TW" altLang="en-US" sz="5400" b="1" dirty="0">
+              <a:rPr lang="zh-TW" altLang="en-US" sz="6600" b="1" dirty="0">
                 <a:solidFill>
                   <a:srgbClr val="000066"/>
                 </a:solidFill>
                 <a:latin typeface="微軟正黑體" pitchFamily="34" charset="-120"/>
                 <a:ea typeface="微軟正黑體" pitchFamily="34" charset="-120"/>
               </a:rPr>
-              <a:t>我何等愛主  何等崇拜主</a:t>
-            </a:r>
-            <a:endParaRPr lang="en-US" altLang="zh-TW" sz="5400" b="1" dirty="0">
+              <a:t>雖在黑夜茫茫  毫無半點指望</a:t>
+            </a:r>
+            <a:endParaRPr lang="en-US" altLang="zh-TW" sz="6600" b="1" dirty="0">
               <a:solidFill>
                 <a:srgbClr val="000066"/>
               </a:solidFill>
@@ -3947,21 +4427,180 @@
               <a:ea typeface="微軟正黑體" pitchFamily="34" charset="-120"/>
             </a:endParaRPr>
           </a:p>
+        </p:txBody>
+      </p:sp>
+      <p:sp>
+        <p:nvSpPr>
+          <p:cNvPr id="3" name="TextBox 2">
+            <a:extLst>
+              <a:ext uri="{FF2B5EF4-FFF2-40B4-BE49-F238E27FC236}">
+                <a16:creationId xmlns:a16="http://schemas.microsoft.com/office/drawing/2014/main" id="{FA175DD0-F211-14DE-420F-4A50F79B6BD2}"/>
+              </a:ext>
+            </a:extLst>
+          </p:cNvPr>
+          <p:cNvSpPr txBox="1"/>
+          <p:nvPr/>
+        </p:nvSpPr>
+        <p:spPr>
+          <a:xfrm>
+            <a:off x="0" y="5157193"/>
+            <a:ext cx="12192000" cy="584775"/>
+          </a:xfrm>
+          <a:prstGeom prst="rect">
+            <a:avLst/>
+          </a:prstGeom>
+          <a:noFill/>
+        </p:spPr>
+        <p:txBody>
+          <a:bodyPr wrap="square" rtlCol="0">
+            <a:spAutoFit/>
+          </a:bodyPr>
+          <a:lstStyle/>
+          <a:p>
+            <a:pPr algn="ctr"/>
+            <a:r>
+              <a:rPr lang="en-US" sz="3200" b="1" dirty="0">
+                <a:solidFill>
+                  <a:srgbClr val="000066"/>
+                </a:solidFill>
+                <a:latin typeface="+mj-lt"/>
+                <a:ea typeface="Microsoft JhengHei" panose="020B0604030504040204" pitchFamily="34" charset="-120"/>
+              </a:rPr>
+              <a:t>( </a:t>
+            </a:r>
+            <a:r>
+              <a:rPr lang="en-US" altLang="zh-CN" sz="3200" b="1" dirty="0" smtClean="0">
+                <a:solidFill>
+                  <a:srgbClr val="000066"/>
+                </a:solidFill>
+                <a:latin typeface="+mj-lt"/>
+                <a:ea typeface="Microsoft JhengHei" panose="020B0604030504040204" pitchFamily="34" charset="-120"/>
+              </a:rPr>
+              <a:t>2 / 3</a:t>
+            </a:r>
+            <a:r>
+              <a:rPr lang="en-US" sz="3200" b="1" dirty="0" smtClean="0">
+                <a:solidFill>
+                  <a:srgbClr val="000066"/>
+                </a:solidFill>
+                <a:latin typeface="+mj-lt"/>
+                <a:ea typeface="Microsoft JhengHei" panose="020B0604030504040204" pitchFamily="34" charset="-120"/>
+              </a:rPr>
+              <a:t> </a:t>
+            </a:r>
+            <a:r>
+              <a:rPr lang="en-US" sz="3200" b="1" dirty="0">
+                <a:solidFill>
+                  <a:srgbClr val="000066"/>
+                </a:solidFill>
+                <a:latin typeface="+mj-lt"/>
+                <a:ea typeface="Microsoft JhengHei" panose="020B0604030504040204" pitchFamily="34" charset="-120"/>
+              </a:rPr>
+              <a:t>)</a:t>
+            </a:r>
+            <a:endParaRPr lang="vi-VN" sz="3200" b="1" dirty="0">
+              <a:solidFill>
+                <a:srgbClr val="000066"/>
+              </a:solidFill>
+              <a:latin typeface="+mj-lt"/>
+              <a:ea typeface="Microsoft JhengHei" panose="020B0604030504040204" pitchFamily="34" charset="-120"/>
+            </a:endParaRPr>
+          </a:p>
+        </p:txBody>
+      </p:sp>
+    </p:spTree>
+    <p:extLst>
+      <p:ext uri="{BB962C8B-B14F-4D97-AF65-F5344CB8AC3E}">
+        <p14:creationId xmlns:p14="http://schemas.microsoft.com/office/powerpoint/2010/main" val="3478893912"/>
+      </p:ext>
+    </p:extLst>
+  </p:cSld>
+  <p:clrMapOvr>
+    <a:masterClrMapping/>
+  </p:clrMapOvr>
+</p:sld>
+</file>
+
+<file path=ppt/slides/slide7.xml><?xml version="1.0" encoding="utf-8"?>
+<p:sld xmlns:a="http://schemas.openxmlformats.org/drawingml/2006/main" xmlns:r="http://schemas.openxmlformats.org/officeDocument/2006/relationships" xmlns:p="http://schemas.openxmlformats.org/presentationml/2006/main">
+  <p:cSld>
+    <p:spTree>
+      <p:nvGrpSpPr>
+        <p:cNvPr id="1" name="">
+          <a:extLst>
+            <a:ext uri="{FF2B5EF4-FFF2-40B4-BE49-F238E27FC236}">
+              <a16:creationId xmlns:a16="http://schemas.microsoft.com/office/drawing/2014/main" id="{499F6A04-361B-D03C-72FC-83746A3861FC}"/>
+            </a:ext>
+          </a:extLst>
+        </p:cNvPr>
+        <p:cNvGrpSpPr/>
+        <p:nvPr/>
+      </p:nvGrpSpPr>
+      <p:grpSpPr>
+        <a:xfrm>
+          <a:off x="0" y="0"/>
+          <a:ext cx="0" cy="0"/>
+          <a:chOff x="0" y="0"/>
+          <a:chExt cx="0" cy="0"/>
+        </a:xfrm>
+      </p:grpSpPr>
+      <p:sp>
+        <p:nvSpPr>
+          <p:cNvPr id="5" name="內容版面配置區 4">
+            <a:extLst>
+              <a:ext uri="{FF2B5EF4-FFF2-40B4-BE49-F238E27FC236}">
+                <a16:creationId xmlns:a16="http://schemas.microsoft.com/office/drawing/2014/main" id="{EE77592B-EE8B-614D-4160-CDFC7BCE80DB}"/>
+              </a:ext>
+            </a:extLst>
+          </p:cNvPr>
+          <p:cNvSpPr>
+            <a:spLocks noGrp="1"/>
+          </p:cNvSpPr>
+          <p:nvPr>
+            <p:ph idx="1"/>
+          </p:nvPr>
+        </p:nvSpPr>
+        <p:spPr>
+          <a:xfrm>
+            <a:off x="0" y="2084851"/>
+            <a:ext cx="12192000" cy="2404863"/>
+          </a:xfrm>
+        </p:spPr>
+        <p:txBody>
+          <a:bodyPr anchor="ctr">
+            <a:normAutofit/>
+          </a:bodyPr>
+          <a:lstStyle/>
           <a:p>
             <a:pPr algn="ctr">
               <a:buNone/>
             </a:pPr>
             <a:r>
-              <a:rPr lang="zh-TW" altLang="en-US" sz="5400" b="1" dirty="0">
+              <a:rPr lang="zh-TW" altLang="en-US" sz="6600" b="1" dirty="0">
                 <a:solidFill>
                   <a:srgbClr val="000066"/>
                 </a:solidFill>
                 <a:latin typeface="微軟正黑體" pitchFamily="34" charset="-120"/>
                 <a:ea typeface="微軟正黑體" pitchFamily="34" charset="-120"/>
               </a:rPr>
-              <a:t>我生命亮光  我的一切</a:t>
-            </a:r>
-            <a:endParaRPr lang="en-US" altLang="zh-TW" sz="5400" b="1" dirty="0">
+              <a:t>但慈悲上主  甘願離榮光處</a:t>
+            </a:r>
+          </a:p>
+          <a:p>
+            <a:pPr algn="ctr">
+              <a:buNone/>
+            </a:pPr>
+            <a:r>
+              <a:rPr lang="zh-TW" altLang="en-US" sz="6600" b="1" dirty="0">
+                <a:solidFill>
+                  <a:srgbClr val="000066"/>
+                </a:solidFill>
+                <a:latin typeface="微軟正黑體" pitchFamily="34" charset="-120"/>
+                <a:ea typeface="微軟正黑體" pitchFamily="34" charset="-120"/>
+              </a:rPr>
+              <a:t>降世救贖我靈魂免滅亡</a:t>
+            </a:r>
+            <a:endParaRPr lang="zh-TW" altLang="en-US" sz="6600" b="1" dirty="0">
               <a:solidFill>
                 <a:srgbClr val="000066"/>
               </a:solidFill>
@@ -3969,27 +4608,290 @@
               <a:ea typeface="微軟正黑體" pitchFamily="34" charset="-120"/>
             </a:endParaRPr>
           </a:p>
+        </p:txBody>
+      </p:sp>
+      <p:sp>
+        <p:nvSpPr>
+          <p:cNvPr id="3" name="TextBox 2">
+            <a:extLst>
+              <a:ext uri="{FF2B5EF4-FFF2-40B4-BE49-F238E27FC236}">
+                <a16:creationId xmlns:a16="http://schemas.microsoft.com/office/drawing/2014/main" id="{FA175DD0-F211-14DE-420F-4A50F79B6BD2}"/>
+              </a:ext>
+            </a:extLst>
+          </p:cNvPr>
+          <p:cNvSpPr txBox="1"/>
+          <p:nvPr/>
+        </p:nvSpPr>
+        <p:spPr>
+          <a:xfrm>
+            <a:off x="0" y="5157193"/>
+            <a:ext cx="12192000" cy="584775"/>
+          </a:xfrm>
+          <a:prstGeom prst="rect">
+            <a:avLst/>
+          </a:prstGeom>
+          <a:noFill/>
+        </p:spPr>
+        <p:txBody>
+          <a:bodyPr wrap="square" rtlCol="0">
+            <a:spAutoFit/>
+          </a:bodyPr>
+          <a:lstStyle/>
+          <a:p>
+            <a:pPr algn="ctr"/>
+            <a:r>
+              <a:rPr lang="en-US" sz="3200" b="1" dirty="0">
+                <a:solidFill>
+                  <a:srgbClr val="000066"/>
+                </a:solidFill>
+                <a:latin typeface="+mj-lt"/>
+                <a:ea typeface="Microsoft JhengHei" panose="020B0604030504040204" pitchFamily="34" charset="-120"/>
+              </a:rPr>
+              <a:t>( </a:t>
+            </a:r>
+            <a:r>
+              <a:rPr lang="en-US" altLang="zh-CN" sz="3200" b="1" dirty="0" smtClean="0">
+                <a:solidFill>
+                  <a:srgbClr val="000066"/>
+                </a:solidFill>
+                <a:latin typeface="+mj-lt"/>
+                <a:ea typeface="Microsoft JhengHei" panose="020B0604030504040204" pitchFamily="34" charset="-120"/>
+              </a:rPr>
+              <a:t>2 / 3</a:t>
+            </a:r>
+            <a:r>
+              <a:rPr lang="en-US" sz="3200" b="1" dirty="0" smtClean="0">
+                <a:solidFill>
+                  <a:srgbClr val="000066"/>
+                </a:solidFill>
+                <a:latin typeface="+mj-lt"/>
+                <a:ea typeface="Microsoft JhengHei" panose="020B0604030504040204" pitchFamily="34" charset="-120"/>
+              </a:rPr>
+              <a:t> </a:t>
+            </a:r>
+            <a:r>
+              <a:rPr lang="en-US" sz="3200" b="1" dirty="0">
+                <a:solidFill>
+                  <a:srgbClr val="000066"/>
+                </a:solidFill>
+                <a:latin typeface="+mj-lt"/>
+                <a:ea typeface="Microsoft JhengHei" panose="020B0604030504040204" pitchFamily="34" charset="-120"/>
+              </a:rPr>
+              <a:t>)</a:t>
+            </a:r>
+            <a:endParaRPr lang="vi-VN" sz="3200" b="1" dirty="0">
+              <a:solidFill>
+                <a:srgbClr val="000066"/>
+              </a:solidFill>
+              <a:latin typeface="+mj-lt"/>
+              <a:ea typeface="Microsoft JhengHei" panose="020B0604030504040204" pitchFamily="34" charset="-120"/>
+            </a:endParaRPr>
+          </a:p>
+        </p:txBody>
+      </p:sp>
+    </p:spTree>
+    <p:extLst>
+      <p:ext uri="{BB962C8B-B14F-4D97-AF65-F5344CB8AC3E}">
+        <p14:creationId xmlns:p14="http://schemas.microsoft.com/office/powerpoint/2010/main" val="4132014822"/>
+      </p:ext>
+    </p:extLst>
+  </p:cSld>
+  <p:clrMapOvr>
+    <a:masterClrMapping/>
+  </p:clrMapOvr>
+</p:sld>
+</file>
+
+<file path=ppt/slides/slide8.xml><?xml version="1.0" encoding="utf-8"?>
+<p:sld xmlns:a="http://schemas.openxmlformats.org/drawingml/2006/main" xmlns:r="http://schemas.openxmlformats.org/officeDocument/2006/relationships" xmlns:p="http://schemas.openxmlformats.org/presentationml/2006/main">
+  <p:cSld>
+    <p:spTree>
+      <p:nvGrpSpPr>
+        <p:cNvPr id="1" name="">
+          <a:extLst>
+            <a:ext uri="{FF2B5EF4-FFF2-40B4-BE49-F238E27FC236}">
+              <a16:creationId xmlns:a16="http://schemas.microsoft.com/office/drawing/2014/main" id="{499F6A04-361B-D03C-72FC-83746A3861FC}"/>
+            </a:ext>
+          </a:extLst>
+        </p:cNvPr>
+        <p:cNvGrpSpPr/>
+        <p:nvPr/>
+      </p:nvGrpSpPr>
+      <p:grpSpPr>
+        <a:xfrm>
+          <a:off x="0" y="0"/>
+          <a:ext cx="0" cy="0"/>
+          <a:chOff x="0" y="0"/>
+          <a:chExt cx="0" cy="0"/>
+        </a:xfrm>
+      </p:grpSpPr>
+      <p:sp>
+        <p:nvSpPr>
+          <p:cNvPr id="5" name="內容版面配置區 4">
+            <a:extLst>
+              <a:ext uri="{FF2B5EF4-FFF2-40B4-BE49-F238E27FC236}">
+                <a16:creationId xmlns:a16="http://schemas.microsoft.com/office/drawing/2014/main" id="{EE77592B-EE8B-614D-4160-CDFC7BCE80DB}"/>
+              </a:ext>
+            </a:extLst>
+          </p:cNvPr>
+          <p:cNvSpPr>
+            <a:spLocks noGrp="1"/>
+          </p:cNvSpPr>
+          <p:nvPr>
+            <p:ph idx="1"/>
+          </p:nvPr>
+        </p:nvSpPr>
+        <p:spPr>
+          <a:xfrm>
+            <a:off x="0" y="2084851"/>
+            <a:ext cx="12192000" cy="2404863"/>
+          </a:xfrm>
+        </p:spPr>
+        <p:txBody>
+          <a:bodyPr anchor="ctr">
+            <a:normAutofit/>
+          </a:bodyPr>
+          <a:lstStyle/>
           <a:p>
             <a:pPr algn="ctr">
               <a:buNone/>
             </a:pPr>
             <a:r>
-              <a:rPr lang="zh-TW" altLang="en-US" sz="5400" b="1" dirty="0">
+              <a:rPr lang="zh-TW" altLang="en-US" sz="6600" b="1" dirty="0">
                 <a:solidFill>
                   <a:srgbClr val="000066"/>
                 </a:solidFill>
                 <a:latin typeface="微軟正黑體" pitchFamily="34" charset="-120"/>
                 <a:ea typeface="微軟正黑體" pitchFamily="34" charset="-120"/>
               </a:rPr>
-              <a:t>宙大主宰  成為我救主</a:t>
-            </a:r>
+              <a:t>我何等愛主  何等崇拜主</a:t>
+            </a:r>
+            <a:endParaRPr lang="en-US" altLang="zh-TW" sz="6600" b="1" dirty="0">
+              <a:solidFill>
+                <a:srgbClr val="000066"/>
+              </a:solidFill>
+              <a:latin typeface="微軟正黑體" pitchFamily="34" charset="-120"/>
+              <a:ea typeface="微軟正黑體" pitchFamily="34" charset="-120"/>
+            </a:endParaRPr>
           </a:p>
           <a:p>
             <a:pPr algn="ctr">
               <a:buNone/>
             </a:pPr>
             <a:r>
-              <a:rPr lang="zh-TW" altLang="en-US" sz="5400" b="1" dirty="0">
+              <a:rPr lang="zh-TW" altLang="en-US" sz="6600" b="1" dirty="0">
+                <a:solidFill>
+                  <a:srgbClr val="000066"/>
+                </a:solidFill>
+                <a:latin typeface="微軟正黑體" pitchFamily="34" charset="-120"/>
+                <a:ea typeface="微軟正黑體" pitchFamily="34" charset="-120"/>
+              </a:rPr>
+              <a:t>我生命亮光  我的一切</a:t>
+            </a:r>
+            <a:endParaRPr lang="zh-TW" altLang="en-US" sz="6600" b="1" dirty="0">
+              <a:solidFill>
+                <a:srgbClr val="000066"/>
+              </a:solidFill>
+              <a:latin typeface="微軟正黑體" pitchFamily="34" charset="-120"/>
+              <a:ea typeface="微軟正黑體" pitchFamily="34" charset="-120"/>
+            </a:endParaRPr>
+          </a:p>
+        </p:txBody>
+      </p:sp>
+    </p:spTree>
+    <p:extLst>
+      <p:ext uri="{BB962C8B-B14F-4D97-AF65-F5344CB8AC3E}">
+        <p14:creationId xmlns:p14="http://schemas.microsoft.com/office/powerpoint/2010/main" val="1278866539"/>
+      </p:ext>
+    </p:extLst>
+  </p:cSld>
+  <p:clrMapOvr>
+    <a:masterClrMapping/>
+  </p:clrMapOvr>
+</p:sld>
+</file>
+
+<file path=ppt/slides/slide9.xml><?xml version="1.0" encoding="utf-8"?>
+<p:sld xmlns:a="http://schemas.openxmlformats.org/drawingml/2006/main" xmlns:r="http://schemas.openxmlformats.org/officeDocument/2006/relationships" xmlns:p="http://schemas.openxmlformats.org/presentationml/2006/main">
+  <p:cSld>
+    <p:spTree>
+      <p:nvGrpSpPr>
+        <p:cNvPr id="1" name="">
+          <a:extLst>
+            <a:ext uri="{FF2B5EF4-FFF2-40B4-BE49-F238E27FC236}">
+              <a16:creationId xmlns:a16="http://schemas.microsoft.com/office/drawing/2014/main" id="{499F6A04-361B-D03C-72FC-83746A3861FC}"/>
+            </a:ext>
+          </a:extLst>
+        </p:cNvPr>
+        <p:cNvGrpSpPr/>
+        <p:nvPr/>
+      </p:nvGrpSpPr>
+      <p:grpSpPr>
+        <a:xfrm>
+          <a:off x="0" y="0"/>
+          <a:ext cx="0" cy="0"/>
+          <a:chOff x="0" y="0"/>
+          <a:chExt cx="0" cy="0"/>
+        </a:xfrm>
+      </p:grpSpPr>
+      <p:sp>
+        <p:nvSpPr>
+          <p:cNvPr id="5" name="內容版面配置區 4">
+            <a:extLst>
+              <a:ext uri="{FF2B5EF4-FFF2-40B4-BE49-F238E27FC236}">
+                <a16:creationId xmlns:a16="http://schemas.microsoft.com/office/drawing/2014/main" id="{EE77592B-EE8B-614D-4160-CDFC7BCE80DB}"/>
+              </a:ext>
+            </a:extLst>
+          </p:cNvPr>
+          <p:cNvSpPr>
+            <a:spLocks noGrp="1"/>
+          </p:cNvSpPr>
+          <p:nvPr>
+            <p:ph idx="1"/>
+          </p:nvPr>
+        </p:nvSpPr>
+        <p:spPr>
+          <a:xfrm>
+            <a:off x="0" y="2084851"/>
+            <a:ext cx="12192000" cy="2404863"/>
+          </a:xfrm>
+        </p:spPr>
+        <p:txBody>
+          <a:bodyPr anchor="ctr">
+            <a:normAutofit/>
+          </a:bodyPr>
+          <a:lstStyle/>
+          <a:p>
+            <a:pPr algn="ctr">
+              <a:buNone/>
+            </a:pPr>
+            <a:r>
+              <a:rPr lang="zh-TW" altLang="en-US" sz="6600" b="1" dirty="0" smtClean="0">
+                <a:solidFill>
+                  <a:srgbClr val="000066"/>
+                </a:solidFill>
+                <a:latin typeface="微軟正黑體" pitchFamily="34" charset="-120"/>
+                <a:ea typeface="微軟正黑體" pitchFamily="34" charset="-120"/>
+              </a:rPr>
+              <a:t>宙</a:t>
+            </a:r>
+            <a:r>
+              <a:rPr lang="zh-TW" altLang="en-US" sz="6600" b="1" dirty="0">
+                <a:solidFill>
+                  <a:srgbClr val="000066"/>
+                </a:solidFill>
+                <a:latin typeface="微軟正黑體" pitchFamily="34" charset="-120"/>
+                <a:ea typeface="微軟正黑體" pitchFamily="34" charset="-120"/>
+              </a:rPr>
+              <a:t>大主宰  成為我救主</a:t>
+            </a:r>
+          </a:p>
+          <a:p>
+            <a:pPr algn="ctr">
+              <a:buNone/>
+            </a:pPr>
+            <a:r>
+              <a:rPr lang="zh-TW" altLang="en-US" sz="6600" b="1" dirty="0">
                 <a:solidFill>
                   <a:srgbClr val="000066"/>
                 </a:solidFill>
@@ -3998,10 +4900,22 @@
               </a:rPr>
               <a:t>神一切豐盛  全在主裡</a:t>
             </a:r>
+            <a:endParaRPr lang="zh-TW" altLang="en-US" sz="6600" b="1" dirty="0">
+              <a:solidFill>
+                <a:srgbClr val="000066"/>
+              </a:solidFill>
+              <a:latin typeface="微軟正黑體" pitchFamily="34" charset="-120"/>
+              <a:ea typeface="微軟正黑體" pitchFamily="34" charset="-120"/>
+            </a:endParaRPr>
           </a:p>
         </p:txBody>
       </p:sp>
     </p:spTree>
+    <p:extLst>
+      <p:ext uri="{BB962C8B-B14F-4D97-AF65-F5344CB8AC3E}">
+        <p14:creationId xmlns:p14="http://schemas.microsoft.com/office/powerpoint/2010/main" val="1754562616"/>
+      </p:ext>
+    </p:extLst>
   </p:cSld>
   <p:clrMapOvr>
     <a:masterClrMapping/>
